--- a/config/pptx-styles/strict/base-template.pptx
+++ b/config/pptx-styles/strict/base-template.pptx
@@ -2241,7 +2241,7 @@
                 <a:solidFill>
                   <a:srgbClr val="1F1E1E"/>
                 </a:solidFill>
-                <a:latin typeface="Roboto Mono Medium" pitchFamily="34" charset="0"/>
+                <a:latin typeface="Helvetica Bold" pitchFamily="34" charset="0"/>
                 <a:ea typeface="Roboto Mono Medium" pitchFamily="34" charset="-122"/>
                 <a:cs typeface="Roboto Mono Medium" pitchFamily="34" charset="-120"/>
               </a:rPr>
@@ -2283,7 +2283,7 @@
                 <a:solidFill>
                   <a:srgbClr val="1F1E1E"/>
                 </a:solidFill>
-                <a:latin typeface="Roboto Mono Medium" pitchFamily="34" charset="0"/>
+                <a:latin typeface="Helvetica Bold" pitchFamily="34" charset="0"/>
                 <a:ea typeface="Roboto Mono Medium" pitchFamily="34" charset="-122"/>
                 <a:cs typeface="Roboto Mono Medium" pitchFamily="34" charset="-120"/>
               </a:rPr>
@@ -2328,7 +2328,7 @@
                 <a:solidFill>
                   <a:srgbClr val="3B3535"/>
                 </a:solidFill>
-                <a:latin typeface="Roboto" pitchFamily="34" charset="0"/>
+                <a:latin typeface="Helvetica" pitchFamily="34" charset="0"/>
                 <a:ea typeface="Roboto" pitchFamily="34" charset="-122"/>
                 <a:cs typeface="Roboto" pitchFamily="34" charset="-120"/>
               </a:rPr>
@@ -2348,7 +2348,7 @@
                 <a:solidFill>
                   <a:srgbClr val="3B3535"/>
                 </a:solidFill>
-                <a:latin typeface="Roboto" pitchFamily="34" charset="0"/>
+                <a:latin typeface="Helvetica" pitchFamily="34" charset="0"/>
                 <a:ea typeface="Roboto" pitchFamily="34" charset="-122"/>
                 <a:cs typeface="Roboto" pitchFamily="34" charset="-120"/>
               </a:rPr>
@@ -2391,6 +2391,1156 @@
 </file>
 
 <file path=ppt/slides/slide10.xml><?xml version="1.0" encoding="utf-8"?>
+<p:sld xmlns:a="http://schemas.openxmlformats.org/drawingml/2006/main" xmlns:r="http://schemas.openxmlformats.org/officeDocument/2006/relationships" xmlns:p="http://schemas.openxmlformats.org/presentationml/2006/main">
+  <p:cSld name="Slide 9">
+    <p:spTree>
+      <p:nvGrpSpPr>
+        <p:cNvPr id="1" name=""/>
+        <p:cNvGrpSpPr/>
+        <p:nvPr/>
+      </p:nvGrpSpPr>
+      <p:grpSpPr>
+        <a:xfrm>
+          <a:off x="0" y="0"/>
+          <a:ext cx="0" cy="0"/>
+          <a:chOff x="0" y="0"/>
+          <a:chExt cx="0" cy="0"/>
+        </a:xfrm>
+      </p:grpSpPr>
+      <p:sp>
+        <p:nvSpPr>
+          <p:cNvPr id="2" name="Shape 0"/>
+          <p:cNvSpPr/>
+          <p:nvPr/>
+        </p:nvSpPr>
+        <p:spPr>
+          <a:xfrm>
+            <a:off x="480640" y="515838"/>
+            <a:ext cx="1955081" cy="183207"/>
+          </a:xfrm>
+          <a:prstGeom prst="roundRect">
+            <a:avLst>
+              <a:gd name="adj" fmla="val 3119"/>
+            </a:avLst>
+          </a:prstGeom>
+          <a:solidFill>
+            <a:srgbClr val="F9D2D6"/>
+          </a:solidFill>
+          <a:ln/>
+        </p:spPr>
+      </p:sp>
+      <p:sp>
+        <p:nvSpPr>
+          <p:cNvPr id="3" name="Text 1"/>
+          <p:cNvSpPr/>
+          <p:nvPr/>
+        </p:nvSpPr>
+        <p:spPr>
+          <a:xfrm>
+            <a:off x="547539" y="549250"/>
+            <a:ext cx="2278484" cy="116384"/>
+          </a:xfrm>
+          <a:prstGeom prst="rect">
+            <a:avLst/>
+          </a:prstGeom>
+          <a:noFill/>
+          <a:ln/>
+        </p:spPr>
+        <p:txBody>
+          <a:bodyPr wrap="none" lIns="0" tIns="0" rIns="0" bIns="0" rtlCol="0" anchor="t"/>
+          <a:lstStyle/>
+          <a:p>
+            <a:pPr algn="l" indent="0" marL="0">
+              <a:lnSpc>
+                <a:spcPct val="109000"/>
+              </a:lnSpc>
+              <a:buNone/>
+            </a:pPr>
+            <a:r>
+              <a:rPr lang="en-US" sz="700" dirty="0">
+                <a:solidFill>
+                  <a:srgbClr val="3B3535"/>
+                </a:solidFill>
+                <a:latin typeface="Roboto" pitchFamily="34" charset="0"/>
+                <a:ea typeface="Roboto" pitchFamily="34" charset="-122"/>
+                <a:cs typeface="Roboto" pitchFamily="34" charset="-120"/>
+              </a:rPr>
+              <a:t>TEMPLATE — CONTENT + IMAGE (DENSE)</a:t>
+            </a:r>
+            <a:endParaRPr lang="en-US" sz="700" dirty="0"/>
+          </a:p>
+        </p:txBody>
+      </p:sp>
+      <p:sp>
+        <p:nvSpPr>
+          <p:cNvPr id="4" name="Text 2"/>
+          <p:cNvSpPr/>
+          <p:nvPr/>
+        </p:nvSpPr>
+        <p:spPr>
+          <a:xfrm>
+            <a:off x="480640" y="727100"/>
+            <a:ext cx="5310932" cy="348704"/>
+          </a:xfrm>
+          <a:prstGeom prst="rect">
+            <a:avLst/>
+          </a:prstGeom>
+          <a:noFill/>
+          <a:ln/>
+        </p:spPr>
+        <p:txBody>
+          <a:bodyPr wrap="none" lIns="0" tIns="0" rIns="0" bIns="0" rtlCol="0" anchor="t"/>
+          <a:lstStyle/>
+          <a:p>
+            <a:pPr algn="l" indent="0" marL="0">
+              <a:lnSpc>
+                <a:spcPct val="104000"/>
+              </a:lnSpc>
+              <a:buNone/>
+            </a:pPr>
+            <a:r>
+              <a:rPr lang="en-US" sz="2150" dirty="0">
+                <a:solidFill>
+                  <a:srgbClr val="1F1E1E"/>
+                </a:solidFill>
+                <a:latin typeface="Roboto Mono Medium" pitchFamily="34" charset="0"/>
+                <a:ea typeface="Roboto Mono Medium" pitchFamily="34" charset="-122"/>
+                <a:cs typeface="Roboto Mono Medium" pitchFamily="34" charset="-120"/>
+              </a:rPr>
+              <a:t>{{Slide title (h2) 1}}</a:t>
+            </a:r>
+            <a:endParaRPr lang="en-US" sz="2150" dirty="0"/>
+          </a:p>
+        </p:txBody>
+      </p:sp>
+      <p:sp>
+        <p:nvSpPr>
+          <p:cNvPr id="5" name="Shape 3"/>
+          <p:cNvSpPr/>
+          <p:nvPr/>
+        </p:nvSpPr>
+        <p:spPr>
+          <a:xfrm>
+            <a:off x="400273" y="1181174"/>
+            <a:ext cx="3693244" cy="3446413"/>
+          </a:xfrm>
+          <a:prstGeom prst="roundRect">
+            <a:avLst>
+              <a:gd name="adj" fmla="val 486"/>
+            </a:avLst>
+          </a:prstGeom>
+          <a:solidFill>
+            <a:srgbClr val="DA1B2E">
+              <a:alpha val="95000"/>
+            </a:srgbClr>
+          </a:solidFill>
+          <a:ln/>
+        </p:spPr>
+      </p:sp>
+      <p:sp>
+        <p:nvSpPr>
+          <p:cNvPr id="6" name="Text 4"/>
+          <p:cNvSpPr/>
+          <p:nvPr/>
+        </p:nvSpPr>
+        <p:spPr>
+          <a:xfrm>
+            <a:off x="511820" y="1251421"/>
+            <a:ext cx="1879104" cy="174278"/>
+          </a:xfrm>
+          <a:prstGeom prst="rect">
+            <a:avLst/>
+          </a:prstGeom>
+          <a:noFill/>
+          <a:ln/>
+        </p:spPr>
+        <p:txBody>
+          <a:bodyPr wrap="none" lIns="0" tIns="0" rIns="0" bIns="0" rtlCol="0" anchor="t"/>
+          <a:lstStyle/>
+          <a:p>
+            <a:pPr algn="l" indent="0" marL="0">
+              <a:lnSpc>
+                <a:spcPct val="104000"/>
+              </a:lnSpc>
+              <a:buNone/>
+            </a:pPr>
+            <a:r>
+              <a:rPr lang="en-US" sz="1050" dirty="0">
+                <a:solidFill>
+                  <a:srgbClr val="FFFFFF"/>
+                </a:solidFill>
+                <a:latin typeface="Roboto Mono Medium" pitchFamily="34" charset="0"/>
+                <a:ea typeface="Roboto Mono Medium" pitchFamily="34" charset="-122"/>
+                <a:cs typeface="Roboto Mono Medium" pitchFamily="34" charset="-120"/>
+              </a:rPr>
+              <a:t>{{Body paragraph 1}}</a:t>
+            </a:r>
+            <a:endParaRPr lang="en-US" sz="1050" dirty="0"/>
+          </a:p>
+        </p:txBody>
+      </p:sp>
+      <p:sp>
+        <p:nvSpPr>
+          <p:cNvPr id="7" name="Text 5"/>
+          <p:cNvSpPr/>
+          <p:nvPr/>
+        </p:nvSpPr>
+        <p:spPr>
+          <a:xfrm>
+            <a:off x="511820" y="1495946"/>
+            <a:ext cx="3470151" cy="436438"/>
+          </a:xfrm>
+          <a:prstGeom prst="rect">
+            <a:avLst/>
+          </a:prstGeom>
+          <a:noFill/>
+          <a:ln/>
+        </p:spPr>
+        <p:txBody>
+          <a:bodyPr wrap="square" lIns="0" tIns="0" rIns="0" bIns="0" rtlCol="0" anchor="t">
+            <a:normAutofit/>
+          </a:bodyPr>
+          <a:lstStyle/>
+          <a:p>
+            <a:pPr algn="l" indent="0" marL="0">
+              <a:lnSpc>
+                <a:spcPct val="109000"/>
+              </a:lnSpc>
+              <a:buNone/>
+            </a:pPr>
+            <a:r>
+              <a:rPr lang="en-US" sz="850" dirty="0">
+                <a:solidFill>
+                  <a:srgbClr val="FFFFFF"/>
+                </a:solidFill>
+                <a:latin typeface="Roboto" pitchFamily="34" charset="0"/>
+                <a:ea typeface="Roboto" pitchFamily="34" charset="-122"/>
+                <a:cs typeface="Roboto" pitchFamily="34" charset="-120"/>
+              </a:rPr>
+              <a:t>{{Caption / fine print 1}}</a:t>
+            </a:r>
+            <a:endParaRPr lang="en-US" sz="850" dirty="0"/>
+          </a:p>
+        </p:txBody>
+      </p:sp>
+      <p:pic>
+        <p:nvPicPr>
+          <p:cNvPr id="8" name="Image 0" descr="preencoded.png">    </p:cNvPr>
+          <p:cNvPicPr>
+            <a:picLocks noChangeAspect="1"/>
+          </p:cNvPicPr>
+          <p:nvPr/>
+        </p:nvPicPr>
+        <p:blipFill>
+          <a:blip r:embed="rId1">
+            <a:extLst>
+              <a:ext uri="{96DAC541-7B7A-43D3-8B79-37D633B846F1}">
+                <asvg:svgBlip xmlns:asvg="http://schemas.microsoft.com/office/drawing/2016/SVG/main" r:embed="rId2"/>
+              </a:ext>
+            </a:extLst>
+          </a:blip>
+          <a:stretch>
+            <a:fillRect/>
+          </a:stretch>
+        </p:blipFill>
+        <p:spPr>
+          <a:xfrm>
+            <a:off x="511820" y="2011412"/>
+            <a:ext cx="223168" cy="223168"/>
+          </a:xfrm>
+          <a:prstGeom prst="rect">
+            <a:avLst/>
+          </a:prstGeom>
+        </p:spPr>
+      </p:pic>
+      <p:sp>
+        <p:nvSpPr>
+          <p:cNvPr id="9" name="Text 6"/>
+          <p:cNvSpPr/>
+          <p:nvPr/>
+        </p:nvSpPr>
+        <p:spPr>
+          <a:xfrm>
+            <a:off x="822796" y="2049735"/>
+            <a:ext cx="1756470" cy="174278"/>
+          </a:xfrm>
+          <a:prstGeom prst="rect">
+            <a:avLst/>
+          </a:prstGeom>
+          <a:noFill/>
+          <a:ln/>
+        </p:spPr>
+        <p:txBody>
+          <a:bodyPr wrap="none" lIns="0" tIns="0" rIns="0" bIns="0" rtlCol="0" anchor="t"/>
+          <a:lstStyle/>
+          <a:p>
+            <a:pPr algn="l" indent="0" marL="0">
+              <a:lnSpc>
+                <a:spcPct val="104000"/>
+              </a:lnSpc>
+              <a:buNone/>
+            </a:pPr>
+            <a:r>
+              <a:rPr lang="en-US" sz="1050" dirty="0">
+                <a:solidFill>
+                  <a:srgbClr val="FFFFFF"/>
+                </a:solidFill>
+                <a:latin typeface="Roboto Mono Medium" pitchFamily="34" charset="0"/>
+                <a:ea typeface="Roboto Mono Medium" pitchFamily="34" charset="-122"/>
+                <a:cs typeface="Roboto Mono Medium" pitchFamily="34" charset="-120"/>
+              </a:rPr>
+              <a:t>{{Body paragraph 2}}</a:t>
+            </a:r>
+            <a:endParaRPr lang="en-US" sz="1050" dirty="0"/>
+          </a:p>
+        </p:txBody>
+      </p:sp>
+      <p:sp>
+        <p:nvSpPr>
+          <p:cNvPr id="10" name="Text 7"/>
+          <p:cNvSpPr/>
+          <p:nvPr/>
+        </p:nvSpPr>
+        <p:spPr>
+          <a:xfrm>
+            <a:off x="822796" y="2294260"/>
+            <a:ext cx="3159175" cy="290959"/>
+          </a:xfrm>
+          <a:prstGeom prst="rect">
+            <a:avLst/>
+          </a:prstGeom>
+          <a:noFill/>
+          <a:ln/>
+        </p:spPr>
+        <p:txBody>
+          <a:bodyPr wrap="square" lIns="0" tIns="0" rIns="0" bIns="0" rtlCol="0" anchor="t">
+            <a:normAutofit/>
+          </a:bodyPr>
+          <a:lstStyle/>
+          <a:p>
+            <a:pPr algn="l" indent="0" marL="0">
+              <a:lnSpc>
+                <a:spcPct val="109000"/>
+              </a:lnSpc>
+              <a:buNone/>
+            </a:pPr>
+            <a:r>
+              <a:rPr lang="en-US" sz="850" dirty="0">
+                <a:solidFill>
+                  <a:srgbClr val="FFFFFF"/>
+                </a:solidFill>
+                <a:latin typeface="Roboto" pitchFamily="34" charset="0"/>
+                <a:ea typeface="Roboto" pitchFamily="34" charset="-122"/>
+                <a:cs typeface="Roboto" pitchFamily="34" charset="-120"/>
+              </a:rPr>
+              <a:t>{{Caption / fine print 2}}</a:t>
+            </a:r>
+            <a:endParaRPr lang="en-US" sz="850" dirty="0"/>
+          </a:p>
+        </p:txBody>
+      </p:sp>
+      <p:pic>
+        <p:nvPicPr>
+          <p:cNvPr id="11" name="Image 1" descr="preencoded.png">    </p:cNvPr>
+          <p:cNvPicPr>
+            <a:picLocks noChangeAspect="1"/>
+          </p:cNvPicPr>
+          <p:nvPr/>
+        </p:nvPicPr>
+        <p:blipFill>
+          <a:blip r:embed="rId3">
+            <a:extLst>
+              <a:ext uri="{96DAC541-7B7A-43D3-8B79-37D633B846F1}">
+                <asvg:svgBlip xmlns:asvg="http://schemas.microsoft.com/office/drawing/2016/SVG/main" r:embed="rId4"/>
+              </a:ext>
+            </a:extLst>
+          </a:blip>
+          <a:stretch>
+            <a:fillRect/>
+          </a:stretch>
+        </p:blipFill>
+        <p:spPr>
+          <a:xfrm>
+            <a:off x="511820" y="2725713"/>
+            <a:ext cx="223168" cy="223168"/>
+          </a:xfrm>
+          <a:prstGeom prst="rect">
+            <a:avLst/>
+          </a:prstGeom>
+        </p:spPr>
+      </p:pic>
+      <p:sp>
+        <p:nvSpPr>
+          <p:cNvPr id="12" name="Text 8"/>
+          <p:cNvSpPr/>
+          <p:nvPr/>
+        </p:nvSpPr>
+        <p:spPr>
+          <a:xfrm>
+            <a:off x="822796" y="2764036"/>
+            <a:ext cx="2174677" cy="174278"/>
+          </a:xfrm>
+          <a:prstGeom prst="rect">
+            <a:avLst/>
+          </a:prstGeom>
+          <a:noFill/>
+          <a:ln/>
+        </p:spPr>
+        <p:txBody>
+          <a:bodyPr wrap="none" lIns="0" tIns="0" rIns="0" bIns="0" rtlCol="0" anchor="t"/>
+          <a:lstStyle/>
+          <a:p>
+            <a:pPr algn="l" indent="0" marL="0">
+              <a:lnSpc>
+                <a:spcPct val="104000"/>
+              </a:lnSpc>
+              <a:buNone/>
+            </a:pPr>
+            <a:r>
+              <a:rPr lang="en-US" sz="1050" dirty="0">
+                <a:solidFill>
+                  <a:srgbClr val="FFFFFF"/>
+                </a:solidFill>
+                <a:latin typeface="Roboto Mono Medium" pitchFamily="34" charset="0"/>
+                <a:ea typeface="Roboto Mono Medium" pitchFamily="34" charset="-122"/>
+                <a:cs typeface="Roboto Mono Medium" pitchFamily="34" charset="-120"/>
+              </a:rPr>
+              <a:t>{{Body paragraph 3}}</a:t>
+            </a:r>
+            <a:endParaRPr lang="en-US" sz="1050" dirty="0"/>
+          </a:p>
+        </p:txBody>
+      </p:sp>
+      <p:sp>
+        <p:nvSpPr>
+          <p:cNvPr id="13" name="Text 9"/>
+          <p:cNvSpPr/>
+          <p:nvPr/>
+        </p:nvSpPr>
+        <p:spPr>
+          <a:xfrm>
+            <a:off x="822796" y="3008561"/>
+            <a:ext cx="3159175" cy="290959"/>
+          </a:xfrm>
+          <a:prstGeom prst="rect">
+            <a:avLst/>
+          </a:prstGeom>
+          <a:noFill/>
+          <a:ln/>
+        </p:spPr>
+        <p:txBody>
+          <a:bodyPr wrap="square" lIns="0" tIns="0" rIns="0" bIns="0" rtlCol="0" anchor="t">
+            <a:normAutofit/>
+          </a:bodyPr>
+          <a:lstStyle/>
+          <a:p>
+            <a:pPr algn="l" indent="0" marL="0">
+              <a:lnSpc>
+                <a:spcPct val="109000"/>
+              </a:lnSpc>
+              <a:buNone/>
+            </a:pPr>
+            <a:r>
+              <a:rPr lang="en-US" sz="850" dirty="0">
+                <a:solidFill>
+                  <a:srgbClr val="FFFFFF"/>
+                </a:solidFill>
+                <a:latin typeface="Roboto" pitchFamily="34" charset="0"/>
+                <a:ea typeface="Roboto" pitchFamily="34" charset="-122"/>
+                <a:cs typeface="Roboto" pitchFamily="34" charset="-120"/>
+              </a:rPr>
+              <a:t>{{Caption / fine print 3}}</a:t>
+            </a:r>
+            <a:endParaRPr lang="en-US" sz="850" dirty="0"/>
+          </a:p>
+        </p:txBody>
+      </p:sp>
+      <p:pic>
+        <p:nvPicPr>
+          <p:cNvPr id="14" name="Image 2" descr="preencoded.png">    </p:cNvPr>
+          <p:cNvPicPr>
+            <a:picLocks noChangeAspect="1"/>
+          </p:cNvPicPr>
+          <p:nvPr/>
+        </p:nvPicPr>
+        <p:blipFill>
+          <a:blip r:embed="rId5">
+            <a:extLst>
+              <a:ext uri="{96DAC541-7B7A-43D3-8B79-37D633B846F1}">
+                <asvg:svgBlip xmlns:asvg="http://schemas.microsoft.com/office/drawing/2016/SVG/main" r:embed="rId6"/>
+              </a:ext>
+            </a:extLst>
+          </a:blip>
+          <a:stretch>
+            <a:fillRect/>
+          </a:stretch>
+        </p:blipFill>
+        <p:spPr>
+          <a:xfrm>
+            <a:off x="511820" y="3440013"/>
+            <a:ext cx="223168" cy="223168"/>
+          </a:xfrm>
+          <a:prstGeom prst="rect">
+            <a:avLst/>
+          </a:prstGeom>
+        </p:spPr>
+      </p:pic>
+      <p:sp>
+        <p:nvSpPr>
+          <p:cNvPr id="15" name="Text 10"/>
+          <p:cNvSpPr/>
+          <p:nvPr/>
+        </p:nvSpPr>
+        <p:spPr>
+          <a:xfrm>
+            <a:off x="822796" y="3478337"/>
+            <a:ext cx="1756470" cy="174278"/>
+          </a:xfrm>
+          <a:prstGeom prst="rect">
+            <a:avLst/>
+          </a:prstGeom>
+          <a:noFill/>
+          <a:ln/>
+        </p:spPr>
+        <p:txBody>
+          <a:bodyPr wrap="none" lIns="0" tIns="0" rIns="0" bIns="0" rtlCol="0" anchor="t"/>
+          <a:lstStyle/>
+          <a:p>
+            <a:pPr algn="l" indent="0" marL="0">
+              <a:lnSpc>
+                <a:spcPct val="104000"/>
+              </a:lnSpc>
+              <a:buNone/>
+            </a:pPr>
+            <a:r>
+              <a:rPr lang="en-US" sz="1050" dirty="0">
+                <a:solidFill>
+                  <a:srgbClr val="FFFFFF"/>
+                </a:solidFill>
+                <a:latin typeface="Roboto Mono Medium" pitchFamily="34" charset="0"/>
+                <a:ea typeface="Roboto Mono Medium" pitchFamily="34" charset="-122"/>
+                <a:cs typeface="Roboto Mono Medium" pitchFamily="34" charset="-120"/>
+              </a:rPr>
+              <a:t>{{Body paragraph 4}}</a:t>
+            </a:r>
+            <a:endParaRPr lang="en-US" sz="1050" dirty="0"/>
+          </a:p>
+        </p:txBody>
+      </p:sp>
+      <p:sp>
+        <p:nvSpPr>
+          <p:cNvPr id="16" name="Text 11"/>
+          <p:cNvSpPr/>
+          <p:nvPr/>
+        </p:nvSpPr>
+        <p:spPr>
+          <a:xfrm>
+            <a:off x="822796" y="3722861"/>
+            <a:ext cx="3159175" cy="290959"/>
+          </a:xfrm>
+          <a:prstGeom prst="rect">
+            <a:avLst/>
+          </a:prstGeom>
+          <a:noFill/>
+          <a:ln/>
+        </p:spPr>
+        <p:txBody>
+          <a:bodyPr wrap="square" lIns="0" tIns="0" rIns="0" bIns="0" rtlCol="0" anchor="t">
+            <a:normAutofit/>
+          </a:bodyPr>
+          <a:lstStyle/>
+          <a:p>
+            <a:pPr algn="l" indent="0" marL="0">
+              <a:lnSpc>
+                <a:spcPct val="109000"/>
+              </a:lnSpc>
+              <a:buNone/>
+            </a:pPr>
+            <a:r>
+              <a:rPr lang="en-US" sz="850" dirty="0">
+                <a:solidFill>
+                  <a:srgbClr val="FFFFFF"/>
+                </a:solidFill>
+                <a:latin typeface="Roboto" pitchFamily="34" charset="0"/>
+                <a:ea typeface="Roboto" pitchFamily="34" charset="-122"/>
+                <a:cs typeface="Roboto" pitchFamily="34" charset="-120"/>
+              </a:rPr>
+              <a:t>{{Caption / fine print 4}}</a:t>
+            </a:r>
+            <a:endParaRPr lang="en-US" sz="850" dirty="0"/>
+          </a:p>
+        </p:txBody>
+      </p:sp>
+      <p:sp>
+        <p:nvSpPr>
+          <p:cNvPr id="17" name="Text 12"/>
+          <p:cNvSpPr/>
+          <p:nvPr/>
+        </p:nvSpPr>
+        <p:spPr>
+          <a:xfrm>
+            <a:off x="4290120" y="1251421"/>
+            <a:ext cx="2548235" cy="174278"/>
+          </a:xfrm>
+          <a:prstGeom prst="rect">
+            <a:avLst/>
+          </a:prstGeom>
+          <a:noFill/>
+          <a:ln/>
+        </p:spPr>
+        <p:txBody>
+          <a:bodyPr wrap="none" lIns="0" tIns="0" rIns="0" bIns="0" rtlCol="0" anchor="t"/>
+          <a:lstStyle/>
+          <a:p>
+            <a:pPr algn="l" indent="0" marL="0">
+              <a:lnSpc>
+                <a:spcPct val="104000"/>
+              </a:lnSpc>
+              <a:buNone/>
+            </a:pPr>
+            <a:r>
+              <a:rPr lang="en-US" sz="1050" dirty="0">
+                <a:solidFill>
+                  <a:srgbClr val="1F1E1E"/>
+                </a:solidFill>
+                <a:latin typeface="Roboto Mono Medium" pitchFamily="34" charset="0"/>
+                <a:ea typeface="Roboto Mono Medium" pitchFamily="34" charset="-122"/>
+                <a:cs typeface="Roboto Mono Medium" pitchFamily="34" charset="-120"/>
+              </a:rPr>
+              <a:t>{{Body paragraph 5}}</a:t>
+            </a:r>
+            <a:endParaRPr lang="en-US" sz="1050" dirty="0"/>
+          </a:p>
+        </p:txBody>
+      </p:sp>
+      <p:sp>
+        <p:nvSpPr>
+          <p:cNvPr id="18" name="Shape 13"/>
+          <p:cNvSpPr/>
+          <p:nvPr/>
+        </p:nvSpPr>
+        <p:spPr>
+          <a:xfrm>
+            <a:off x="4290120" y="1504727"/>
+            <a:ext cx="4378003" cy="3043833"/>
+          </a:xfrm>
+          <a:prstGeom prst="roundRect">
+            <a:avLst>
+              <a:gd name="adj" fmla="val 188"/>
+            </a:avLst>
+          </a:prstGeom>
+          <a:solidFill>
+            <a:srgbClr val="F2EEEE"/>
+          </a:solidFill>
+          <a:ln w="4763">
+            <a:solidFill>
+              <a:srgbClr val="D8D4D4"/>
+            </a:solidFill>
+            <a:prstDash val="solid"/>
+          </a:ln>
+        </p:spPr>
+      </p:sp>
+      <p:sp>
+        <p:nvSpPr>
+          <p:cNvPr id="19" name="Shape 14"/>
+          <p:cNvSpPr/>
+          <p:nvPr/>
+        </p:nvSpPr>
+        <p:spPr>
+          <a:xfrm>
+            <a:off x="4294882" y="1509489"/>
+            <a:ext cx="4368478" cy="758577"/>
+          </a:xfrm>
+          <a:prstGeom prst="roundRect">
+            <a:avLst>
+              <a:gd name="adj" fmla="val 753"/>
+            </a:avLst>
+          </a:prstGeom>
+          <a:solidFill>
+            <a:srgbClr val="F2EEEE"/>
+          </a:solidFill>
+          <a:ln/>
+        </p:spPr>
+      </p:sp>
+      <p:sp>
+        <p:nvSpPr>
+          <p:cNvPr id="20" name="Text 15"/>
+          <p:cNvSpPr/>
+          <p:nvPr/>
+        </p:nvSpPr>
+        <p:spPr>
+          <a:xfrm>
+            <a:off x="4406429" y="1621036"/>
+            <a:ext cx="1421904" cy="174278"/>
+          </a:xfrm>
+          <a:prstGeom prst="rect">
+            <a:avLst/>
+          </a:prstGeom>
+          <a:noFill/>
+          <a:ln/>
+        </p:spPr>
+        <p:txBody>
+          <a:bodyPr wrap="none" lIns="0" tIns="0" rIns="0" bIns="0" rtlCol="0" anchor="t"/>
+          <a:lstStyle/>
+          <a:p>
+            <a:pPr algn="l" indent="0" marL="0">
+              <a:lnSpc>
+                <a:spcPct val="104000"/>
+              </a:lnSpc>
+              <a:buNone/>
+            </a:pPr>
+            <a:r>
+              <a:rPr lang="en-US" sz="1050" dirty="0">
+                <a:solidFill>
+                  <a:srgbClr val="3B3535"/>
+                </a:solidFill>
+                <a:latin typeface="Roboto Mono Medium" pitchFamily="34" charset="0"/>
+                <a:ea typeface="Roboto Mono Medium" pitchFamily="34" charset="-122"/>
+                <a:cs typeface="Roboto Mono Medium" pitchFamily="34" charset="-120"/>
+              </a:rPr>
+              <a:t>{{Body paragraph 6}}</a:t>
+            </a:r>
+            <a:endParaRPr lang="en-US" sz="1050" dirty="0"/>
+          </a:p>
+        </p:txBody>
+      </p:sp>
+      <p:sp>
+        <p:nvSpPr>
+          <p:cNvPr id="21" name="Text 16"/>
+          <p:cNvSpPr/>
+          <p:nvPr/>
+        </p:nvSpPr>
+        <p:spPr>
+          <a:xfrm>
+            <a:off x="4406429" y="1865561"/>
+            <a:ext cx="4145384" cy="290959"/>
+          </a:xfrm>
+          <a:prstGeom prst="rect">
+            <a:avLst/>
+          </a:prstGeom>
+          <a:noFill/>
+          <a:ln/>
+        </p:spPr>
+        <p:txBody>
+          <a:bodyPr wrap="square" lIns="0" tIns="0" rIns="0" bIns="0" rtlCol="0" anchor="t">
+            <a:normAutofit/>
+          </a:bodyPr>
+          <a:lstStyle/>
+          <a:p>
+            <a:pPr algn="l" indent="0" marL="0">
+              <a:lnSpc>
+                <a:spcPct val="109000"/>
+              </a:lnSpc>
+              <a:buNone/>
+            </a:pPr>
+            <a:r>
+              <a:rPr lang="en-US" sz="850" dirty="0">
+                <a:solidFill>
+                  <a:srgbClr val="3B3535"/>
+                </a:solidFill>
+                <a:latin typeface="Roboto" pitchFamily="34" charset="0"/>
+                <a:ea typeface="Roboto" pitchFamily="34" charset="-122"/>
+                <a:cs typeface="Roboto" pitchFamily="34" charset="-120"/>
+              </a:rPr>
+              <a:t>{{Caption / fine print 5}}</a:t>
+            </a:r>
+            <a:endParaRPr lang="en-US" sz="850" dirty="0"/>
+          </a:p>
+        </p:txBody>
+      </p:sp>
+      <p:sp>
+        <p:nvSpPr>
+          <p:cNvPr id="22" name="Shape 17"/>
+          <p:cNvSpPr/>
+          <p:nvPr/>
+        </p:nvSpPr>
+        <p:spPr>
+          <a:xfrm>
+            <a:off x="4294882" y="2268066"/>
+            <a:ext cx="4368478" cy="758577"/>
+          </a:xfrm>
+          <a:prstGeom prst="rect">
+            <a:avLst/>
+          </a:prstGeom>
+          <a:solidFill>
+            <a:srgbClr val="F2EEEE"/>
+          </a:solidFill>
+          <a:ln/>
+        </p:spPr>
+      </p:sp>
+      <p:sp>
+        <p:nvSpPr>
+          <p:cNvPr id="23" name="Shape 18"/>
+          <p:cNvSpPr/>
+          <p:nvPr/>
+        </p:nvSpPr>
+        <p:spPr>
+          <a:xfrm>
+            <a:off x="4294882" y="2268066"/>
+            <a:ext cx="4368478" cy="14288"/>
+          </a:xfrm>
+          <a:prstGeom prst="roundRect">
+            <a:avLst>
+              <a:gd name="adj" fmla="val 39999"/>
+            </a:avLst>
+          </a:prstGeom>
+          <a:solidFill>
+            <a:srgbClr val="D8D4D4"/>
+          </a:solidFill>
+          <a:ln/>
+        </p:spPr>
+      </p:sp>
+      <p:sp>
+        <p:nvSpPr>
+          <p:cNvPr id="24" name="Text 19"/>
+          <p:cNvSpPr/>
+          <p:nvPr/>
+        </p:nvSpPr>
+        <p:spPr>
+          <a:xfrm>
+            <a:off x="4406429" y="2379613"/>
+            <a:ext cx="2091035" cy="174278"/>
+          </a:xfrm>
+          <a:prstGeom prst="rect">
+            <a:avLst/>
+          </a:prstGeom>
+          <a:noFill/>
+          <a:ln/>
+        </p:spPr>
+        <p:txBody>
+          <a:bodyPr wrap="none" lIns="0" tIns="0" rIns="0" bIns="0" rtlCol="0" anchor="t"/>
+          <a:lstStyle/>
+          <a:p>
+            <a:pPr algn="l" indent="0" marL="0">
+              <a:lnSpc>
+                <a:spcPct val="104000"/>
+              </a:lnSpc>
+              <a:buNone/>
+            </a:pPr>
+            <a:r>
+              <a:rPr lang="en-US" sz="1050" dirty="0">
+                <a:solidFill>
+                  <a:srgbClr val="3B3535"/>
+                </a:solidFill>
+                <a:latin typeface="Roboto Mono Medium" pitchFamily="34" charset="0"/>
+                <a:ea typeface="Roboto Mono Medium" pitchFamily="34" charset="-122"/>
+                <a:cs typeface="Roboto Mono Medium" pitchFamily="34" charset="-120"/>
+              </a:rPr>
+              <a:t>{{Body paragraph 7}}</a:t>
+            </a:r>
+            <a:endParaRPr lang="en-US" sz="1050" dirty="0"/>
+          </a:p>
+        </p:txBody>
+      </p:sp>
+      <p:sp>
+        <p:nvSpPr>
+          <p:cNvPr id="25" name="Text 20"/>
+          <p:cNvSpPr/>
+          <p:nvPr/>
+        </p:nvSpPr>
+        <p:spPr>
+          <a:xfrm>
+            <a:off x="4406429" y="2624138"/>
+            <a:ext cx="4145384" cy="290959"/>
+          </a:xfrm>
+          <a:prstGeom prst="rect">
+            <a:avLst/>
+          </a:prstGeom>
+          <a:noFill/>
+          <a:ln/>
+        </p:spPr>
+        <p:txBody>
+          <a:bodyPr wrap="square" lIns="0" tIns="0" rIns="0" bIns="0" rtlCol="0" anchor="t">
+            <a:normAutofit/>
+          </a:bodyPr>
+          <a:lstStyle/>
+          <a:p>
+            <a:pPr algn="l" indent="0" marL="0">
+              <a:lnSpc>
+                <a:spcPct val="109000"/>
+              </a:lnSpc>
+              <a:buNone/>
+            </a:pPr>
+            <a:r>
+              <a:rPr lang="en-US" sz="850" dirty="0">
+                <a:solidFill>
+                  <a:srgbClr val="3B3535"/>
+                </a:solidFill>
+                <a:latin typeface="Roboto" pitchFamily="34" charset="0"/>
+                <a:ea typeface="Roboto" pitchFamily="34" charset="-122"/>
+                <a:cs typeface="Roboto" pitchFamily="34" charset="-120"/>
+              </a:rPr>
+              <a:t>{{Caption / fine print 6}}</a:t>
+            </a:r>
+            <a:endParaRPr lang="en-US" sz="850" dirty="0"/>
+          </a:p>
+        </p:txBody>
+      </p:sp>
+      <p:sp>
+        <p:nvSpPr>
+          <p:cNvPr id="26" name="Shape 21"/>
+          <p:cNvSpPr/>
+          <p:nvPr/>
+        </p:nvSpPr>
+        <p:spPr>
+          <a:xfrm>
+            <a:off x="4294882" y="3026643"/>
+            <a:ext cx="4368478" cy="758577"/>
+          </a:xfrm>
+          <a:prstGeom prst="rect">
+            <a:avLst/>
+          </a:prstGeom>
+          <a:solidFill>
+            <a:srgbClr val="F2EEEE"/>
+          </a:solidFill>
+          <a:ln/>
+        </p:spPr>
+      </p:sp>
+      <p:sp>
+        <p:nvSpPr>
+          <p:cNvPr id="27" name="Shape 22"/>
+          <p:cNvSpPr/>
+          <p:nvPr/>
+        </p:nvSpPr>
+        <p:spPr>
+          <a:xfrm>
+            <a:off x="4294882" y="3026643"/>
+            <a:ext cx="4368478" cy="14288"/>
+          </a:xfrm>
+          <a:prstGeom prst="roundRect">
+            <a:avLst>
+              <a:gd name="adj" fmla="val 39999"/>
+            </a:avLst>
+          </a:prstGeom>
+          <a:solidFill>
+            <a:srgbClr val="D8D4D4"/>
+          </a:solidFill>
+          <a:ln/>
+        </p:spPr>
+      </p:sp>
+      <p:sp>
+        <p:nvSpPr>
+          <p:cNvPr id="28" name="Text 23"/>
+          <p:cNvSpPr/>
+          <p:nvPr/>
+        </p:nvSpPr>
+        <p:spPr>
+          <a:xfrm>
+            <a:off x="4406429" y="3138190"/>
+            <a:ext cx="1923752" cy="174278"/>
+          </a:xfrm>
+          <a:prstGeom prst="rect">
+            <a:avLst/>
+          </a:prstGeom>
+          <a:noFill/>
+          <a:ln/>
+        </p:spPr>
+        <p:txBody>
+          <a:bodyPr wrap="none" lIns="0" tIns="0" rIns="0" bIns="0" rtlCol="0" anchor="t"/>
+          <a:lstStyle/>
+          <a:p>
+            <a:pPr algn="l" indent="0" marL="0">
+              <a:lnSpc>
+                <a:spcPct val="104000"/>
+              </a:lnSpc>
+              <a:buNone/>
+            </a:pPr>
+            <a:r>
+              <a:rPr lang="en-US" sz="1050" dirty="0">
+                <a:solidFill>
+                  <a:srgbClr val="3B3535"/>
+                </a:solidFill>
+                <a:latin typeface="Roboto Mono Medium" pitchFamily="34" charset="0"/>
+                <a:ea typeface="Roboto Mono Medium" pitchFamily="34" charset="-122"/>
+                <a:cs typeface="Roboto Mono Medium" pitchFamily="34" charset="-120"/>
+              </a:rPr>
+              <a:t>{{Body paragraph 8}}</a:t>
+            </a:r>
+            <a:endParaRPr lang="en-US" sz="1050" dirty="0"/>
+          </a:p>
+        </p:txBody>
+      </p:sp>
+      <p:sp>
+        <p:nvSpPr>
+          <p:cNvPr id="29" name="Text 24"/>
+          <p:cNvSpPr/>
+          <p:nvPr/>
+        </p:nvSpPr>
+        <p:spPr>
+          <a:xfrm>
+            <a:off x="4406429" y="3382714"/>
+            <a:ext cx="4145384" cy="290959"/>
+          </a:xfrm>
+          <a:prstGeom prst="rect">
+            <a:avLst/>
+          </a:prstGeom>
+          <a:noFill/>
+          <a:ln/>
+        </p:spPr>
+        <p:txBody>
+          <a:bodyPr wrap="square" lIns="0" tIns="0" rIns="0" bIns="0" rtlCol="0" anchor="t">
+            <a:normAutofit/>
+          </a:bodyPr>
+          <a:lstStyle/>
+          <a:p>
+            <a:pPr algn="l" indent="0" marL="0">
+              <a:lnSpc>
+                <a:spcPct val="109000"/>
+              </a:lnSpc>
+              <a:buNone/>
+            </a:pPr>
+            <a:r>
+              <a:rPr lang="en-US" sz="850" dirty="0">
+                <a:solidFill>
+                  <a:srgbClr val="3B3535"/>
+                </a:solidFill>
+                <a:latin typeface="Roboto" pitchFamily="34" charset="0"/>
+                <a:ea typeface="Roboto" pitchFamily="34" charset="-122"/>
+                <a:cs typeface="Roboto" pitchFamily="34" charset="-120"/>
+              </a:rPr>
+              <a:t>{{Caption / fine print 7}}</a:t>
+            </a:r>
+            <a:endParaRPr lang="en-US" sz="850" dirty="0"/>
+          </a:p>
+        </p:txBody>
+      </p:sp>
+      <p:sp>
+        <p:nvSpPr>
+          <p:cNvPr id="30" name="Shape 25"/>
+          <p:cNvSpPr/>
+          <p:nvPr/>
+        </p:nvSpPr>
+        <p:spPr>
+          <a:xfrm>
+            <a:off x="4294882" y="3785220"/>
+            <a:ext cx="4368478" cy="758577"/>
+          </a:xfrm>
+          <a:prstGeom prst="rect">
+            <a:avLst/>
+          </a:prstGeom>
+          <a:solidFill>
+            <a:srgbClr val="F2EEEE"/>
+          </a:solidFill>
+          <a:ln/>
+        </p:spPr>
+      </p:sp>
+      <p:sp>
+        <p:nvSpPr>
+          <p:cNvPr id="31" name="Shape 26"/>
+          <p:cNvSpPr/>
+          <p:nvPr/>
+        </p:nvSpPr>
+        <p:spPr>
+          <a:xfrm>
+            <a:off x="4294882" y="3785220"/>
+            <a:ext cx="4368478" cy="14288"/>
+          </a:xfrm>
+          <a:prstGeom prst="roundRect">
+            <a:avLst>
+              <a:gd name="adj" fmla="val 39999"/>
+            </a:avLst>
+          </a:prstGeom>
+          <a:solidFill>
+            <a:srgbClr val="D8D4D4"/>
+          </a:solidFill>
+          <a:ln/>
+        </p:spPr>
+      </p:sp>
+      <p:sp>
+        <p:nvSpPr>
+          <p:cNvPr id="32" name="Text 27"/>
+          <p:cNvSpPr/>
+          <p:nvPr/>
+        </p:nvSpPr>
+        <p:spPr>
+          <a:xfrm>
+            <a:off x="4406429" y="3896767"/>
+            <a:ext cx="1394817" cy="174278"/>
+          </a:xfrm>
+          <a:prstGeom prst="rect">
+            <a:avLst/>
+          </a:prstGeom>
+          <a:noFill/>
+          <a:ln/>
+        </p:spPr>
+        <p:txBody>
+          <a:bodyPr wrap="none" lIns="0" tIns="0" rIns="0" bIns="0" rtlCol="0" anchor="t"/>
+          <a:lstStyle/>
+          <a:p>
+            <a:pPr algn="l" indent="0" marL="0">
+              <a:lnSpc>
+                <a:spcPct val="104000"/>
+              </a:lnSpc>
+              <a:buNone/>
+            </a:pPr>
+            <a:r>
+              <a:rPr lang="en-US" sz="1050" dirty="0">
+                <a:solidFill>
+                  <a:srgbClr val="3B3535"/>
+                </a:solidFill>
+                <a:latin typeface="Roboto Mono Medium" pitchFamily="34" charset="0"/>
+                <a:ea typeface="Roboto Mono Medium" pitchFamily="34" charset="-122"/>
+                <a:cs typeface="Roboto Mono Medium" pitchFamily="34" charset="-120"/>
+              </a:rPr>
+              <a:t>{{Body paragraph 9}}</a:t>
+            </a:r>
+            <a:endParaRPr lang="en-US" sz="1050" dirty="0"/>
+          </a:p>
+        </p:txBody>
+      </p:sp>
+      <p:sp>
+        <p:nvSpPr>
+          <p:cNvPr id="33" name="Text 28"/>
+          <p:cNvSpPr/>
+          <p:nvPr/>
+        </p:nvSpPr>
+        <p:spPr>
+          <a:xfrm>
+            <a:off x="4406429" y="4141291"/>
+            <a:ext cx="4145384" cy="290959"/>
+          </a:xfrm>
+          <a:prstGeom prst="rect">
+            <a:avLst/>
+          </a:prstGeom>
+          <a:noFill/>
+          <a:ln/>
+        </p:spPr>
+        <p:txBody>
+          <a:bodyPr wrap="square" lIns="0" tIns="0" rIns="0" bIns="0" rtlCol="0" anchor="t">
+            <a:normAutofit/>
+          </a:bodyPr>
+          <a:lstStyle/>
+          <a:p>
+            <a:pPr algn="l" indent="0" marL="0">
+              <a:lnSpc>
+                <a:spcPct val="109000"/>
+              </a:lnSpc>
+              <a:buNone/>
+            </a:pPr>
+            <a:r>
+              <a:rPr lang="en-US" sz="850" dirty="0">
+                <a:solidFill>
+                  <a:srgbClr val="3B3535"/>
+                </a:solidFill>
+                <a:latin typeface="Roboto" pitchFamily="34" charset="0"/>
+                <a:ea typeface="Roboto" pitchFamily="34" charset="-122"/>
+                <a:cs typeface="Roboto" pitchFamily="34" charset="-120"/>
+              </a:rPr>
+              <a:t>{{Caption / fine print 8}}</a:t>
+            </a:r>
+            <a:endParaRPr lang="en-US" sz="850" dirty="0"/>
+          </a:p>
+        </p:txBody>
+      </p:sp>
+    </p:spTree>
+  </p:cSld>
+  <p:clrMapOvr>
+    <a:masterClrMapping/>
+  </p:clrMapOvr>
+</p:sld>
+</file>
+
+<file path=ppt/slides/slide11.xml><?xml version="1.0" encoding="utf-8"?>
 <p:sld xmlns:a="http://schemas.openxmlformats.org/drawingml/2006/main" xmlns:r="http://schemas.openxmlformats.org/officeDocument/2006/relationships" xmlns:p="http://schemas.openxmlformats.org/presentationml/2006/main">
   <p:cSld name="Slide 10">
     <p:spTree>
@@ -3689,7 +4839,7 @@
 </p:sld>
 </file>
 
-<file path=ppt/slides/slide11.xml><?xml version="1.0" encoding="utf-8"?>
+<file path=ppt/slides/slide12.xml><?xml version="1.0" encoding="utf-8"?>
 <p:sld xmlns:a="http://schemas.openxmlformats.org/drawingml/2006/main" xmlns:r="http://schemas.openxmlformats.org/officeDocument/2006/relationships" xmlns:p="http://schemas.openxmlformats.org/presentationml/2006/main">
   <p:cSld name="Slide 11">
     <p:spTree>
@@ -4719,7 +5869,7 @@
 </p:sld>
 </file>
 
-<file path=ppt/slides/slide12.xml><?xml version="1.0" encoding="utf-8"?>
+<file path=ppt/slides/slide13.xml><?xml version="1.0" encoding="utf-8"?>
 <p:sld xmlns:a="http://schemas.openxmlformats.org/drawingml/2006/main" xmlns:r="http://schemas.openxmlformats.org/officeDocument/2006/relationships" xmlns:p="http://schemas.openxmlformats.org/presentationml/2006/main">
   <p:cSld name="Slide 12">
     <p:spTree>
@@ -6022,275 +7172,6 @@
               <a:t>{{SECTION_7_SUBTITLE}}</a:t>
             </a:r>
             <a:endParaRPr lang="en-US" sz="850" dirty="0"/>
-          </a:p>
-        </p:txBody>
-      </p:sp>
-    </p:spTree>
-  </p:cSld>
-  <p:clrMapOvr>
-    <a:masterClrMapping/>
-  </p:clrMapOvr>
-</p:sld>
-</file>
-
-<file path=ppt/slides/slide13.xml><?xml version="1.0" encoding="utf-8"?>
-<p:sld xmlns:a="http://schemas.openxmlformats.org/drawingml/2006/main" xmlns:r="http://schemas.openxmlformats.org/officeDocument/2006/relationships" xmlns:p="http://schemas.openxmlformats.org/presentationml/2006/main">
-  <p:cSld name="Separator">
-    <p:spTree>
-      <p:nvGrpSpPr>
-        <p:cNvPr id="1" name=""/>
-        <p:cNvGrpSpPr/>
-        <p:nvPr/>
-      </p:nvGrpSpPr>
-      <p:grpSpPr>
-        <a:xfrm>
-          <a:off x="0" y="0"/>
-          <a:ext cx="0" cy="0"/>
-          <a:chOff x="0" y="0"/>
-          <a:chExt cx="0" cy="0"/>
-        </a:xfrm>
-      </p:grpSpPr>
-      <p:sp>
-        <p:nvSpPr>
-          <p:cNvPr id="2" name="Banner"/>
-          <p:cNvSpPr/>
-          <p:nvPr/>
-        </p:nvSpPr>
-        <p:spPr>
-          <a:xfrm>
-            <a:off x="0" y="1700000"/>
-            <a:ext cx="9144000" cy="1700000"/>
-          </a:xfrm>
-          <a:prstGeom prst="rect">
-            <a:avLst/>
-          </a:prstGeom>
-          <a:solidFill>
-            <a:srgbClr val="DA1B2E"/>
-          </a:solidFill>
-          <a:ln/>
-        </p:spPr>
-      </p:sp>
-      <p:sp>
-        <p:nvSpPr>
-          <p:cNvPr id="3" name="TemplateTitle"/>
-          <p:cNvSpPr/>
-          <p:nvPr/>
-        </p:nvSpPr>
-        <p:spPr>
-          <a:xfrm>
-            <a:off x="496119" y="1850000"/>
-            <a:ext cx="8151763" cy="450000"/>
-          </a:xfrm>
-          <a:prstGeom prst="rect">
-            <a:avLst/>
-          </a:prstGeom>
-          <a:noFill/>
-          <a:ln/>
-        </p:spPr>
-        <p:txBody>
-          <a:bodyPr wrap="square" lIns="0" tIns="0" rIns="0" bIns="0" rtlCol="0" anchor="t"/>
-          <a:lstStyle/>
-          <a:p>
-            <a:pPr algn="ctr" indent="0" marL="0">
-              <a:lnSpc>
-                <a:spcPct val="100000"/>
-              </a:lnSpc>
-              <a:buNone/>
-            </a:pPr>
-            <a:r>
-              <a:rPr lang="en-US" sz="2400" dirty="0">
-                <a:solidFill>
-                  <a:srgbClr val="FFFFFF"/>
-                </a:solidFill>
-                <a:latin typeface="Roboto Mono Medium" pitchFamily="34" charset="0"/>
-              </a:rPr>
-              <a:t>TEMPLATE  —  LAYOUT EXAMPLES BELOW</a:t>
-            </a:r>
-          </a:p>
-        </p:txBody>
-      </p:sp>
-      <p:sp>
-        <p:nvSpPr>
-          <p:cNvPr id="4" name="TemplateSubtitle"/>
-          <p:cNvSpPr/>
-          <p:nvPr/>
-        </p:nvSpPr>
-        <p:spPr>
-          <a:xfrm>
-            <a:off x="496119" y="2400000"/>
-            <a:ext cx="8151763" cy="850000"/>
-          </a:xfrm>
-          <a:prstGeom prst="rect">
-            <a:avLst/>
-          </a:prstGeom>
-          <a:noFill/>
-          <a:ln/>
-        </p:spPr>
-        <p:txBody>
-          <a:bodyPr wrap="square" lIns="0" tIns="0" rIns="0" bIns="0" rtlCol="0" anchor="t"/>
-          <a:lstStyle/>
-          <a:p>
-            <a:pPr algn="ctr" indent="0" marL="0">
-              <a:lnSpc>
-                <a:spcPct val="123000"/>
-              </a:lnSpc>
-              <a:buNone/>
-            </a:pPr>
-            <a:r>
-              <a:rPr lang="en-US" sz="1300" dirty="0">
-                <a:solidFill>
-                  <a:srgbClr val="FFFFFF"/>
-                </a:solidFill>
-                <a:latin typeface="Roboto" pitchFamily="34" charset="0"/>
-              </a:rPr>
-              <a:t>The slides that follow demonstrate the recurring layout patterns documented in template-style.md.</a:t>
-            </a:r>
-          </a:p>
-          <a:p>
-            <a:pPr algn="ctr" indent="0" marL="0">
-              <a:lnSpc>
-                <a:spcPct val="123000"/>
-              </a:lnSpc>
-              <a:buNone/>
-            </a:pPr>
-            <a:r>
-              <a:rPr lang="en-US" sz="1300" b="1" dirty="0">
-                <a:solidFill>
-                  <a:srgbClr val="FFFFFF"/>
-                </a:solidFill>
-                <a:latin typeface="Roboto" pitchFamily="34" charset="0"/>
-              </a:rPr>
-              <a:t>Reference only — do not copy their content. Copy their structure.</a:t>
-            </a:r>
-          </a:p>
-        </p:txBody>
-      </p:sp>
-      <p:sp>
-        <p:nvSpPr>
-          <p:cNvPr id="5" name="TemplateAbove"/>
-          <p:cNvSpPr/>
-          <p:nvPr/>
-        </p:nvSpPr>
-        <p:spPr>
-          <a:xfrm>
-            <a:off x="496119" y="700000"/>
-            <a:ext cx="8151763" cy="800000"/>
-          </a:xfrm>
-          <a:prstGeom prst="rect">
-            <a:avLst/>
-          </a:prstGeom>
-          <a:noFill/>
-          <a:ln/>
-        </p:spPr>
-        <p:txBody>
-          <a:bodyPr wrap="square" lIns="0" tIns="0" rIns="0" bIns="0" rtlCol="0" anchor="t"/>
-          <a:lstStyle/>
-          <a:p>
-            <a:pPr algn="ctr" indent="0" marL="0">
-              <a:lnSpc>
-                <a:spcPct val="123000"/>
-              </a:lnSpc>
-              <a:buNone/>
-            </a:pPr>
-            <a:r>
-              <a:rPr lang="en-US" sz="1300" dirty="0">
-                <a:solidFill>
-                  <a:srgbClr val="3B3535"/>
-                </a:solidFill>
-                <a:latin typeface="Roboto Mono Medium" pitchFamily="34" charset="0"/>
-              </a:rPr>
-              <a:t>↑ ABOVE — emit as-is with {{placeholder}} substitution</a:t>
-            </a:r>
-          </a:p>
-          <a:p>
-            <a:pPr algn="ctr" indent="0" marL="0">
-              <a:lnSpc>
-                <a:spcPct val="123000"/>
-              </a:lnSpc>
-              <a:buNone/>
-            </a:pPr>
-            <a:r>
-              <a:rPr lang="en-US" sz="1000" dirty="0">
-                <a:solidFill>
-                  <a:srgbClr val="3B3535"/>
-                </a:solidFill>
-                <a:latin typeface="Roboto" pitchFamily="34" charset="0"/>
-              </a:rPr>
-              <a:t>Slide 1 (Cover)   ·   Slide 2 (Agenda — item 1 active)</a:t>
-            </a:r>
-          </a:p>
-        </p:txBody>
-      </p:sp>
-      <p:sp>
-        <p:nvSpPr>
-          <p:cNvPr id="6" name="TemplateBelow"/>
-          <p:cNvSpPr/>
-          <p:nvPr/>
-        </p:nvSpPr>
-        <p:spPr>
-          <a:xfrm>
-            <a:off x="496119" y="3600000"/>
-            <a:ext cx="8151763" cy="1300000"/>
-          </a:xfrm>
-          <a:prstGeom prst="rect">
-            <a:avLst/>
-          </a:prstGeom>
-          <a:noFill/>
-          <a:ln/>
-        </p:spPr>
-        <p:txBody>
-          <a:bodyPr wrap="square" lIns="0" tIns="0" rIns="0" bIns="0" rtlCol="0" anchor="t"/>
-          <a:lstStyle/>
-          <a:p>
-            <a:pPr algn="ctr" indent="0" marL="0">
-              <a:lnSpc>
-                <a:spcPct val="123000"/>
-              </a:lnSpc>
-              <a:buNone/>
-            </a:pPr>
-            <a:r>
-              <a:rPr lang="en-US" sz="1300" dirty="0">
-                <a:solidFill>
-                  <a:srgbClr val="3B3535"/>
-                </a:solidFill>
-                <a:latin typeface="Roboto Mono Medium" pitchFamily="34" charset="0"/>
-              </a:rPr>
-              <a:t>↓ BELOW — pattern examples (do not copy content)</a:t>
-            </a:r>
-          </a:p>
-          <a:p>
-            <a:pPr algn="ctr" indent="0" marL="0">
-              <a:lnSpc>
-                <a:spcPct val="135000"/>
-              </a:lnSpc>
-              <a:buNone/>
-            </a:pPr>
-            <a:r>
-              <a:rPr lang="en-US" sz="900" dirty="0">
-                <a:solidFill>
-                  <a:srgbClr val="3B3535"/>
-                </a:solidFill>
-                <a:latin typeface="Roboto" pitchFamily="34" charset="0"/>
-              </a:rPr>
-              <a:t>9 example slides (image-grid · card-grid · content+image · content+cards+image · code-example) plus a section-divider example (agenda re-emit, item 2 active).</a:t>
-            </a:r>
-          </a:p>
-          <a:p>
-            <a:pPr algn="ctr" indent="0" marL="0">
-              <a:lnSpc>
-                <a:spcPct val="123000"/>
-              </a:lnSpc>
-              <a:buNone/>
-            </a:pPr>
-            <a:r>
-              <a:rPr lang="en-US" sz="850" dirty="0">
-                <a:solidFill>
-                  <a:srgbClr val="6A737D"/>
-                </a:solidFill>
-                <a:latin typeface="Roboto" pitchFamily="34" charset="0"/>
-              </a:rPr>
-              <a:t>Each example slide carries a "TEMPLATE — &lt;LAYOUT&gt;" pill in the top-left identifying its pattern.</a:t>
-            </a:r>
           </a:p>
         </p:txBody>
       </p:sp>
@@ -7459,7 +8340,7 @@
                 <a:solidFill>
                   <a:srgbClr val="1F1E1E"/>
                 </a:solidFill>
-                <a:latin typeface="Roboto Mono Medium" pitchFamily="34" charset="0"/>
+                <a:latin typeface="Helvetica Bold" pitchFamily="34" charset="0"/>
                 <a:ea typeface="Roboto Mono Medium" pitchFamily="34" charset="-122"/>
                 <a:cs typeface="Roboto Mono Medium" pitchFamily="34" charset="-120"/>
               </a:rPr>
@@ -7572,7 +8453,7 @@
                 <a:solidFill>
                   <a:srgbClr val="FFFFFF"/>
                 </a:solidFill>
-                <a:latin typeface="Roboto Mono Medium" pitchFamily="34" charset="0"/>
+                <a:latin typeface="Helvetica Bold" pitchFamily="34" charset="0"/>
                 <a:ea typeface="Roboto Mono Medium" pitchFamily="34" charset="-122"/>
                 <a:cs typeface="Roboto Mono Medium" pitchFamily="34" charset="-120"/>
               </a:rPr>
@@ -7614,7 +8495,7 @@
                 <a:solidFill>
                   <a:srgbClr val="3B3535"/>
                 </a:solidFill>
-                <a:latin typeface="Roboto Mono Medium" pitchFamily="34" charset="0"/>
+                <a:latin typeface="Helvetica Bold" pitchFamily="34" charset="0"/>
                 <a:ea typeface="Roboto Mono Medium" pitchFamily="34" charset="-122"/>
                 <a:cs typeface="Roboto Mono Medium" pitchFamily="34" charset="-120"/>
               </a:rPr>
@@ -7656,7 +8537,7 @@
                 <a:solidFill>
                   <a:srgbClr val="3B3535"/>
                 </a:solidFill>
-                <a:latin typeface="Roboto" pitchFamily="34" charset="0"/>
+                <a:latin typeface="Helvetica" pitchFamily="34" charset="0"/>
                 <a:ea typeface="Roboto" pitchFamily="34" charset="-122"/>
                 <a:cs typeface="Roboto" pitchFamily="34" charset="-120"/>
               </a:rPr>
@@ -7747,7 +8628,7 @@
                 <a:solidFill>
                   <a:srgbClr val="3B3535"/>
                 </a:solidFill>
-                <a:latin typeface="Roboto Mono Medium" pitchFamily="34" charset="0"/>
+                <a:latin typeface="Helvetica Bold" pitchFamily="34" charset="0"/>
                 <a:ea typeface="Roboto Mono Medium" pitchFamily="34" charset="-122"/>
                 <a:cs typeface="Roboto Mono Medium" pitchFamily="34" charset="-120"/>
               </a:rPr>
@@ -7789,7 +8670,7 @@
                 <a:solidFill>
                   <a:srgbClr val="3B3535"/>
                 </a:solidFill>
-                <a:latin typeface="Roboto Mono Medium" pitchFamily="34" charset="0"/>
+                <a:latin typeface="Helvetica Bold" pitchFamily="34" charset="0"/>
                 <a:ea typeface="Roboto Mono Medium" pitchFamily="34" charset="-122"/>
                 <a:cs typeface="Roboto Mono Medium" pitchFamily="34" charset="-120"/>
               </a:rPr>
@@ -7831,7 +8712,7 @@
                 <a:solidFill>
                   <a:srgbClr val="3B3535"/>
                 </a:solidFill>
-                <a:latin typeface="Roboto" pitchFamily="34" charset="0"/>
+                <a:latin typeface="Helvetica" pitchFamily="34" charset="0"/>
                 <a:ea typeface="Roboto" pitchFamily="34" charset="-122"/>
                 <a:cs typeface="Roboto" pitchFamily="34" charset="-120"/>
               </a:rPr>
@@ -7922,7 +8803,7 @@
                 <a:solidFill>
                   <a:srgbClr val="3B3535"/>
                 </a:solidFill>
-                <a:latin typeface="Roboto Mono Medium" pitchFamily="34" charset="0"/>
+                <a:latin typeface="Helvetica Bold" pitchFamily="34" charset="0"/>
                 <a:ea typeface="Roboto Mono Medium" pitchFamily="34" charset="-122"/>
                 <a:cs typeface="Roboto Mono Medium" pitchFamily="34" charset="-120"/>
               </a:rPr>
@@ -7964,7 +8845,7 @@
                 <a:solidFill>
                   <a:srgbClr val="3B3535"/>
                 </a:solidFill>
-                <a:latin typeface="Roboto Mono Medium" pitchFamily="34" charset="0"/>
+                <a:latin typeface="Helvetica Bold" pitchFamily="34" charset="0"/>
                 <a:ea typeface="Roboto Mono Medium" pitchFamily="34" charset="-122"/>
                 <a:cs typeface="Roboto Mono Medium" pitchFamily="34" charset="-120"/>
               </a:rPr>
@@ -8006,7 +8887,7 @@
                 <a:solidFill>
                   <a:srgbClr val="3B3535"/>
                 </a:solidFill>
-                <a:latin typeface="Roboto" pitchFamily="34" charset="0"/>
+                <a:latin typeface="Helvetica" pitchFamily="34" charset="0"/>
                 <a:ea typeface="Roboto" pitchFamily="34" charset="-122"/>
                 <a:cs typeface="Roboto" pitchFamily="34" charset="-120"/>
               </a:rPr>
@@ -8097,7 +8978,7 @@
                 <a:solidFill>
                   <a:srgbClr val="3B3535"/>
                 </a:solidFill>
-                <a:latin typeface="Roboto Mono Medium" pitchFamily="34" charset="0"/>
+                <a:latin typeface="Helvetica Bold" pitchFamily="34" charset="0"/>
                 <a:ea typeface="Roboto Mono Medium" pitchFamily="34" charset="-122"/>
                 <a:cs typeface="Roboto Mono Medium" pitchFamily="34" charset="-120"/>
               </a:rPr>
@@ -8139,7 +9020,7 @@
                 <a:solidFill>
                   <a:srgbClr val="3B3535"/>
                 </a:solidFill>
-                <a:latin typeface="Roboto Mono Medium" pitchFamily="34" charset="0"/>
+                <a:latin typeface="Helvetica Bold" pitchFamily="34" charset="0"/>
                 <a:ea typeface="Roboto Mono Medium" pitchFamily="34" charset="-122"/>
                 <a:cs typeface="Roboto Mono Medium" pitchFamily="34" charset="-120"/>
               </a:rPr>
@@ -8181,7 +9062,7 @@
                 <a:solidFill>
                   <a:srgbClr val="3B3535"/>
                 </a:solidFill>
-                <a:latin typeface="Roboto" pitchFamily="34" charset="0"/>
+                <a:latin typeface="Helvetica" pitchFamily="34" charset="0"/>
                 <a:ea typeface="Roboto" pitchFamily="34" charset="-122"/>
                 <a:cs typeface="Roboto" pitchFamily="34" charset="-120"/>
               </a:rPr>
@@ -8272,7 +9153,7 @@
                 <a:solidFill>
                   <a:srgbClr val="3B3535"/>
                 </a:solidFill>
-                <a:latin typeface="Roboto Mono Medium" pitchFamily="34" charset="0"/>
+                <a:latin typeface="Helvetica Bold" pitchFamily="34" charset="0"/>
                 <a:ea typeface="Roboto Mono Medium" pitchFamily="34" charset="-122"/>
                 <a:cs typeface="Roboto Mono Medium" pitchFamily="34" charset="-120"/>
               </a:rPr>
@@ -8314,7 +9195,7 @@
                 <a:solidFill>
                   <a:srgbClr val="3B3535"/>
                 </a:solidFill>
-                <a:latin typeface="Roboto Mono Medium" pitchFamily="34" charset="0"/>
+                <a:latin typeface="Helvetica Bold" pitchFamily="34" charset="0"/>
                 <a:ea typeface="Roboto Mono Medium" pitchFamily="34" charset="-122"/>
                 <a:cs typeface="Roboto Mono Medium" pitchFamily="34" charset="-120"/>
               </a:rPr>
@@ -8356,7 +9237,7 @@
                 <a:solidFill>
                   <a:srgbClr val="3B3535"/>
                 </a:solidFill>
-                <a:latin typeface="Roboto" pitchFamily="34" charset="0"/>
+                <a:latin typeface="Helvetica" pitchFamily="34" charset="0"/>
                 <a:ea typeface="Roboto" pitchFamily="34" charset="-122"/>
                 <a:cs typeface="Roboto" pitchFamily="34" charset="-120"/>
               </a:rPr>
@@ -8447,7 +9328,7 @@
                 <a:solidFill>
                   <a:srgbClr val="3B3535"/>
                 </a:solidFill>
-                <a:latin typeface="Roboto Mono Medium" pitchFamily="34" charset="0"/>
+                <a:latin typeface="Helvetica Bold" pitchFamily="34" charset="0"/>
                 <a:ea typeface="Roboto Mono Medium" pitchFamily="34" charset="-122"/>
                 <a:cs typeface="Roboto Mono Medium" pitchFamily="34" charset="-120"/>
               </a:rPr>
@@ -8489,7 +9370,7 @@
                 <a:solidFill>
                   <a:srgbClr val="3B3535"/>
                 </a:solidFill>
-                <a:latin typeface="Roboto Mono Medium" pitchFamily="34" charset="0"/>
+                <a:latin typeface="Helvetica Bold" pitchFamily="34" charset="0"/>
                 <a:ea typeface="Roboto Mono Medium" pitchFamily="34" charset="-122"/>
                 <a:cs typeface="Roboto Mono Medium" pitchFamily="34" charset="-120"/>
               </a:rPr>
@@ -8531,7 +9412,7 @@
                 <a:solidFill>
                   <a:srgbClr val="3B3535"/>
                 </a:solidFill>
-                <a:latin typeface="Roboto" pitchFamily="34" charset="0"/>
+                <a:latin typeface="Helvetica" pitchFamily="34" charset="0"/>
                 <a:ea typeface="Roboto" pitchFamily="34" charset="-122"/>
                 <a:cs typeface="Roboto" pitchFamily="34" charset="-120"/>
               </a:rPr>
@@ -8622,7 +9503,7 @@
                 <a:solidFill>
                   <a:srgbClr val="3B3535"/>
                 </a:solidFill>
-                <a:latin typeface="Roboto Mono Medium" pitchFamily="34" charset="0"/>
+                <a:latin typeface="Helvetica Bold" pitchFamily="34" charset="0"/>
                 <a:ea typeface="Roboto Mono Medium" pitchFamily="34" charset="-122"/>
                 <a:cs typeface="Roboto Mono Medium" pitchFamily="34" charset="-120"/>
               </a:rPr>
@@ -8664,7 +9545,7 @@
                 <a:solidFill>
                   <a:srgbClr val="3B3535"/>
                 </a:solidFill>
-                <a:latin typeface="Roboto Mono Medium" pitchFamily="34" charset="0"/>
+                <a:latin typeface="Helvetica Bold" pitchFamily="34" charset="0"/>
                 <a:ea typeface="Roboto Mono Medium" pitchFamily="34" charset="-122"/>
                 <a:cs typeface="Roboto Mono Medium" pitchFamily="34" charset="-120"/>
               </a:rPr>
@@ -8706,7 +9587,7 @@
                 <a:solidFill>
                   <a:srgbClr val="3B3535"/>
                 </a:solidFill>
-                <a:latin typeface="Roboto" pitchFamily="34" charset="0"/>
+                <a:latin typeface="Helvetica" pitchFamily="34" charset="0"/>
                 <a:ea typeface="Roboto" pitchFamily="34" charset="-122"/>
                 <a:cs typeface="Roboto" pitchFamily="34" charset="-120"/>
               </a:rPr>
@@ -8725,6 +9606,275 @@
 </file>
 
 <file path=ppt/slides/slide3.xml><?xml version="1.0" encoding="utf-8"?>
+<p:sld xmlns:a="http://schemas.openxmlformats.org/drawingml/2006/main" xmlns:r="http://schemas.openxmlformats.org/officeDocument/2006/relationships" xmlns:p="http://schemas.openxmlformats.org/presentationml/2006/main">
+  <p:cSld name="Separator">
+    <p:spTree>
+      <p:nvGrpSpPr>
+        <p:cNvPr id="1" name=""/>
+        <p:cNvGrpSpPr/>
+        <p:nvPr/>
+      </p:nvGrpSpPr>
+      <p:grpSpPr>
+        <a:xfrm>
+          <a:off x="0" y="0"/>
+          <a:ext cx="0" cy="0"/>
+          <a:chOff x="0" y="0"/>
+          <a:chExt cx="0" cy="0"/>
+        </a:xfrm>
+      </p:grpSpPr>
+      <p:sp>
+        <p:nvSpPr>
+          <p:cNvPr id="2" name="Banner"/>
+          <p:cNvSpPr/>
+          <p:nvPr/>
+        </p:nvSpPr>
+        <p:spPr>
+          <a:xfrm>
+            <a:off x="0" y="1700000"/>
+            <a:ext cx="9144000" cy="1700000"/>
+          </a:xfrm>
+          <a:prstGeom prst="rect">
+            <a:avLst/>
+          </a:prstGeom>
+          <a:solidFill>
+            <a:srgbClr val="DA1B2E"/>
+          </a:solidFill>
+          <a:ln/>
+        </p:spPr>
+      </p:sp>
+      <p:sp>
+        <p:nvSpPr>
+          <p:cNvPr id="3" name="TemplateTitle"/>
+          <p:cNvSpPr/>
+          <p:nvPr/>
+        </p:nvSpPr>
+        <p:spPr>
+          <a:xfrm>
+            <a:off x="496119" y="1850000"/>
+            <a:ext cx="8151763" cy="450000"/>
+          </a:xfrm>
+          <a:prstGeom prst="rect">
+            <a:avLst/>
+          </a:prstGeom>
+          <a:noFill/>
+          <a:ln/>
+        </p:spPr>
+        <p:txBody>
+          <a:bodyPr wrap="square" lIns="0" tIns="0" rIns="0" bIns="0" rtlCol="0" anchor="t"/>
+          <a:lstStyle/>
+          <a:p>
+            <a:pPr algn="ctr" indent="0" marL="0">
+              <a:lnSpc>
+                <a:spcPct val="100000"/>
+              </a:lnSpc>
+              <a:buNone/>
+            </a:pPr>
+            <a:r>
+              <a:rPr lang="en-US" sz="2400" dirty="0">
+                <a:solidFill>
+                  <a:srgbClr val="FFFFFF"/>
+                </a:solidFill>
+                <a:latin typeface="Roboto Mono Medium" pitchFamily="34" charset="0"/>
+              </a:rPr>
+              <a:t>TEMPLATE  —  LAYOUT EXAMPLES BELOW</a:t>
+            </a:r>
+          </a:p>
+        </p:txBody>
+      </p:sp>
+      <p:sp>
+        <p:nvSpPr>
+          <p:cNvPr id="4" name="TemplateSubtitle"/>
+          <p:cNvSpPr/>
+          <p:nvPr/>
+        </p:nvSpPr>
+        <p:spPr>
+          <a:xfrm>
+            <a:off x="496119" y="2400000"/>
+            <a:ext cx="8151763" cy="850000"/>
+          </a:xfrm>
+          <a:prstGeom prst="rect">
+            <a:avLst/>
+          </a:prstGeom>
+          <a:noFill/>
+          <a:ln/>
+        </p:spPr>
+        <p:txBody>
+          <a:bodyPr wrap="square" lIns="0" tIns="0" rIns="0" bIns="0" rtlCol="0" anchor="t"/>
+          <a:lstStyle/>
+          <a:p>
+            <a:pPr algn="ctr" indent="0" marL="0">
+              <a:lnSpc>
+                <a:spcPct val="123000"/>
+              </a:lnSpc>
+              <a:buNone/>
+            </a:pPr>
+            <a:r>
+              <a:rPr lang="en-US" sz="1300" dirty="0">
+                <a:solidFill>
+                  <a:srgbClr val="FFFFFF"/>
+                </a:solidFill>
+                <a:latin typeface="Roboto" pitchFamily="34" charset="0"/>
+              </a:rPr>
+              <a:t>The slides that follow demonstrate the recurring layout patterns documented in template-style.md.</a:t>
+            </a:r>
+          </a:p>
+          <a:p>
+            <a:pPr algn="ctr" indent="0" marL="0">
+              <a:lnSpc>
+                <a:spcPct val="123000"/>
+              </a:lnSpc>
+              <a:buNone/>
+            </a:pPr>
+            <a:r>
+              <a:rPr lang="en-US" sz="1300" b="1" dirty="0">
+                <a:solidFill>
+                  <a:srgbClr val="FFFFFF"/>
+                </a:solidFill>
+                <a:latin typeface="Roboto" pitchFamily="34" charset="0"/>
+              </a:rPr>
+              <a:t>Reference only — do not copy their content. Copy their structure.</a:t>
+            </a:r>
+          </a:p>
+        </p:txBody>
+      </p:sp>
+      <p:sp>
+        <p:nvSpPr>
+          <p:cNvPr id="5" name="TemplateAbove"/>
+          <p:cNvSpPr/>
+          <p:nvPr/>
+        </p:nvSpPr>
+        <p:spPr>
+          <a:xfrm>
+            <a:off x="496119" y="700000"/>
+            <a:ext cx="8151763" cy="800000"/>
+          </a:xfrm>
+          <a:prstGeom prst="rect">
+            <a:avLst/>
+          </a:prstGeom>
+          <a:noFill/>
+          <a:ln/>
+        </p:spPr>
+        <p:txBody>
+          <a:bodyPr wrap="square" lIns="0" tIns="0" rIns="0" bIns="0" rtlCol="0" anchor="t"/>
+          <a:lstStyle/>
+          <a:p>
+            <a:pPr algn="ctr" indent="0" marL="0">
+              <a:lnSpc>
+                <a:spcPct val="123000"/>
+              </a:lnSpc>
+              <a:buNone/>
+            </a:pPr>
+            <a:r>
+              <a:rPr lang="en-US" sz="1300" dirty="0">
+                <a:solidFill>
+                  <a:srgbClr val="3B3535"/>
+                </a:solidFill>
+                <a:latin typeface="Roboto Mono Medium" pitchFamily="34" charset="0"/>
+              </a:rPr>
+              <a:t>↑ ABOVE — emit as-is with {{placeholder}} substitution</a:t>
+            </a:r>
+          </a:p>
+          <a:p>
+            <a:pPr algn="ctr" indent="0" marL="0">
+              <a:lnSpc>
+                <a:spcPct val="123000"/>
+              </a:lnSpc>
+              <a:buNone/>
+            </a:pPr>
+            <a:r>
+              <a:rPr lang="en-US" sz="1000" dirty="0">
+                <a:solidFill>
+                  <a:srgbClr val="3B3535"/>
+                </a:solidFill>
+                <a:latin typeface="Roboto" pitchFamily="34" charset="0"/>
+              </a:rPr>
+              <a:t>Slide 1 (Cover)   ·   Slide 2 (Agenda — item 1 active)</a:t>
+            </a:r>
+          </a:p>
+        </p:txBody>
+      </p:sp>
+      <p:sp>
+        <p:nvSpPr>
+          <p:cNvPr id="6" name="TemplateBelow"/>
+          <p:cNvSpPr/>
+          <p:nvPr/>
+        </p:nvSpPr>
+        <p:spPr>
+          <a:xfrm>
+            <a:off x="496119" y="3600000"/>
+            <a:ext cx="8151763" cy="1300000"/>
+          </a:xfrm>
+          <a:prstGeom prst="rect">
+            <a:avLst/>
+          </a:prstGeom>
+          <a:noFill/>
+          <a:ln/>
+        </p:spPr>
+        <p:txBody>
+          <a:bodyPr wrap="square" lIns="0" tIns="0" rIns="0" bIns="0" rtlCol="0" anchor="t"/>
+          <a:lstStyle/>
+          <a:p>
+            <a:pPr algn="ctr" indent="0" marL="0">
+              <a:lnSpc>
+                <a:spcPct val="123000"/>
+              </a:lnSpc>
+              <a:buNone/>
+            </a:pPr>
+            <a:r>
+              <a:rPr lang="en-US" sz="1300" dirty="0">
+                <a:solidFill>
+                  <a:srgbClr val="3B3535"/>
+                </a:solidFill>
+                <a:latin typeface="Roboto Mono Medium" pitchFamily="34" charset="0"/>
+              </a:rPr>
+              <a:t>↓ BELOW — pattern examples (do not copy content)</a:t>
+            </a:r>
+          </a:p>
+          <a:p>
+            <a:pPr algn="ctr" indent="0" marL="0">
+              <a:lnSpc>
+                <a:spcPct val="135000"/>
+              </a:lnSpc>
+              <a:buNone/>
+            </a:pPr>
+            <a:r>
+              <a:rPr lang="en-US" sz="900" dirty="0">
+                <a:solidFill>
+                  <a:srgbClr val="3B3535"/>
+                </a:solidFill>
+                <a:latin typeface="Roboto" pitchFamily="34" charset="0"/>
+              </a:rPr>
+              <a:t>9 example slides (image-grid · card-grid · content+image · content+cards+image · code-example) plus a section-divider example (agenda re-emit, item 2 active).</a:t>
+            </a:r>
+          </a:p>
+          <a:p>
+            <a:pPr algn="ctr" indent="0" marL="0">
+              <a:lnSpc>
+                <a:spcPct val="123000"/>
+              </a:lnSpc>
+              <a:buNone/>
+            </a:pPr>
+            <a:r>
+              <a:rPr lang="en-US" sz="850" dirty="0">
+                <a:solidFill>
+                  <a:srgbClr val="6A737D"/>
+                </a:solidFill>
+                <a:latin typeface="Roboto" pitchFamily="34" charset="0"/>
+              </a:rPr>
+              <a:t>Each example slide carries a "TEMPLATE — &lt;LAYOUT&gt;" pill in the top-left identifying its pattern.</a:t>
+            </a:r>
+          </a:p>
+        </p:txBody>
+      </p:sp>
+    </p:spTree>
+  </p:cSld>
+  <p:clrMapOvr>
+    <a:masterClrMapping/>
+  </p:clrMapOvr>
+</p:sld>
+</file>
+
+<file path=ppt/slides/slide4.xml><?xml version="1.0" encoding="utf-8"?>
 <p:sld xmlns:a="http://schemas.openxmlformats.org/drawingml/2006/main" xmlns:r="http://schemas.openxmlformats.org/officeDocument/2006/relationships" xmlns:p="http://schemas.openxmlformats.org/presentationml/2006/main">
   <p:cSld name="Slide 3">
     <p:spTree>
@@ -9374,7 +10524,7 @@
 </p:sld>
 </file>
 
-<file path=ppt/slides/slide4.xml><?xml version="1.0" encoding="utf-8"?>
+<file path=ppt/slides/slide5.xml><?xml version="1.0" encoding="utf-8"?>
 <p:sld xmlns:a="http://schemas.openxmlformats.org/drawingml/2006/main" xmlns:r="http://schemas.openxmlformats.org/officeDocument/2006/relationships" xmlns:p="http://schemas.openxmlformats.org/presentationml/2006/main">
   <p:cSld name="Slide 4">
     <p:spTree>
@@ -10463,7 +11613,7 @@
 </p:sld>
 </file>
 
-<file path=ppt/slides/slide5.xml><?xml version="1.0" encoding="utf-8"?>
+<file path=ppt/slides/slide6.xml><?xml version="1.0" encoding="utf-8"?>
 <p:sld xmlns:a="http://schemas.openxmlformats.org/drawingml/2006/main" xmlns:r="http://schemas.openxmlformats.org/officeDocument/2006/relationships" xmlns:p="http://schemas.openxmlformats.org/presentationml/2006/main">
   <p:cSld name="Slide 5">
     <p:spTree>
@@ -11477,7 +12627,7 @@
 </p:sld>
 </file>
 
-<file path=ppt/slides/slide6.xml><?xml version="1.0" encoding="utf-8"?>
+<file path=ppt/slides/slide7.xml><?xml version="1.0" encoding="utf-8"?>
 <p:sld xmlns:a="http://schemas.openxmlformats.org/drawingml/2006/main" xmlns:r="http://schemas.openxmlformats.org/officeDocument/2006/relationships" xmlns:p="http://schemas.openxmlformats.org/presentationml/2006/main">
   <p:cSld name="Slide 6">
     <p:spTree>
@@ -12026,7 +13176,7 @@
 </p:sld>
 </file>
 
-<file path=ppt/slides/slide7.xml><?xml version="1.0" encoding="utf-8"?>
+<file path=ppt/slides/slide8.xml><?xml version="1.0" encoding="utf-8"?>
 <p:sld xmlns:a="http://schemas.openxmlformats.org/drawingml/2006/main" xmlns:r="http://schemas.openxmlformats.org/officeDocument/2006/relationships" xmlns:p="http://schemas.openxmlformats.org/presentationml/2006/main">
   <p:cSld name="Slide 7">
     <p:spTree>
@@ -12856,7 +14006,7 @@
 </p:sld>
 </file>
 
-<file path=ppt/slides/slide8.xml><?xml version="1.0" encoding="utf-8"?>
+<file path=ppt/slides/slide9.xml><?xml version="1.0" encoding="utf-8"?>
 <p:sld xmlns:a="http://schemas.openxmlformats.org/drawingml/2006/main" xmlns:r="http://schemas.openxmlformats.org/officeDocument/2006/relationships" xmlns:p="http://schemas.openxmlformats.org/presentationml/2006/main">
   <p:cSld name="Slide 8">
     <p:spTree>
@@ -13326,1156 +14476,6 @@
               <a:t>{{Body paragraph 3}}</a:t>
             </a:r>
             <a:endParaRPr lang="en-US" sz="1250" dirty="0"/>
-          </a:p>
-        </p:txBody>
-      </p:sp>
-    </p:spTree>
-  </p:cSld>
-  <p:clrMapOvr>
-    <a:masterClrMapping/>
-  </p:clrMapOvr>
-</p:sld>
-</file>
-
-<file path=ppt/slides/slide9.xml><?xml version="1.0" encoding="utf-8"?>
-<p:sld xmlns:a="http://schemas.openxmlformats.org/drawingml/2006/main" xmlns:r="http://schemas.openxmlformats.org/officeDocument/2006/relationships" xmlns:p="http://schemas.openxmlformats.org/presentationml/2006/main">
-  <p:cSld name="Slide 9">
-    <p:spTree>
-      <p:nvGrpSpPr>
-        <p:cNvPr id="1" name=""/>
-        <p:cNvGrpSpPr/>
-        <p:nvPr/>
-      </p:nvGrpSpPr>
-      <p:grpSpPr>
-        <a:xfrm>
-          <a:off x="0" y="0"/>
-          <a:ext cx="0" cy="0"/>
-          <a:chOff x="0" y="0"/>
-          <a:chExt cx="0" cy="0"/>
-        </a:xfrm>
-      </p:grpSpPr>
-      <p:sp>
-        <p:nvSpPr>
-          <p:cNvPr id="2" name="Shape 0"/>
-          <p:cNvSpPr/>
-          <p:nvPr/>
-        </p:nvSpPr>
-        <p:spPr>
-          <a:xfrm>
-            <a:off x="480640" y="515838"/>
-            <a:ext cx="1955081" cy="183207"/>
-          </a:xfrm>
-          <a:prstGeom prst="roundRect">
-            <a:avLst>
-              <a:gd name="adj" fmla="val 3119"/>
-            </a:avLst>
-          </a:prstGeom>
-          <a:solidFill>
-            <a:srgbClr val="F9D2D6"/>
-          </a:solidFill>
-          <a:ln/>
-        </p:spPr>
-      </p:sp>
-      <p:sp>
-        <p:nvSpPr>
-          <p:cNvPr id="3" name="Text 1"/>
-          <p:cNvSpPr/>
-          <p:nvPr/>
-        </p:nvSpPr>
-        <p:spPr>
-          <a:xfrm>
-            <a:off x="547539" y="549250"/>
-            <a:ext cx="2278484" cy="116384"/>
-          </a:xfrm>
-          <a:prstGeom prst="rect">
-            <a:avLst/>
-          </a:prstGeom>
-          <a:noFill/>
-          <a:ln/>
-        </p:spPr>
-        <p:txBody>
-          <a:bodyPr wrap="none" lIns="0" tIns="0" rIns="0" bIns="0" rtlCol="0" anchor="t"/>
-          <a:lstStyle/>
-          <a:p>
-            <a:pPr algn="l" indent="0" marL="0">
-              <a:lnSpc>
-                <a:spcPct val="109000"/>
-              </a:lnSpc>
-              <a:buNone/>
-            </a:pPr>
-            <a:r>
-              <a:rPr lang="en-US" sz="700" dirty="0">
-                <a:solidFill>
-                  <a:srgbClr val="3B3535"/>
-                </a:solidFill>
-                <a:latin typeface="Roboto" pitchFamily="34" charset="0"/>
-                <a:ea typeface="Roboto" pitchFamily="34" charset="-122"/>
-                <a:cs typeface="Roboto" pitchFamily="34" charset="-120"/>
-              </a:rPr>
-              <a:t>TEMPLATE — CONTENT + IMAGE (DENSE)</a:t>
-            </a:r>
-            <a:endParaRPr lang="en-US" sz="700" dirty="0"/>
-          </a:p>
-        </p:txBody>
-      </p:sp>
-      <p:sp>
-        <p:nvSpPr>
-          <p:cNvPr id="4" name="Text 2"/>
-          <p:cNvSpPr/>
-          <p:nvPr/>
-        </p:nvSpPr>
-        <p:spPr>
-          <a:xfrm>
-            <a:off x="480640" y="727100"/>
-            <a:ext cx="5310932" cy="348704"/>
-          </a:xfrm>
-          <a:prstGeom prst="rect">
-            <a:avLst/>
-          </a:prstGeom>
-          <a:noFill/>
-          <a:ln/>
-        </p:spPr>
-        <p:txBody>
-          <a:bodyPr wrap="none" lIns="0" tIns="0" rIns="0" bIns="0" rtlCol="0" anchor="t"/>
-          <a:lstStyle/>
-          <a:p>
-            <a:pPr algn="l" indent="0" marL="0">
-              <a:lnSpc>
-                <a:spcPct val="104000"/>
-              </a:lnSpc>
-              <a:buNone/>
-            </a:pPr>
-            <a:r>
-              <a:rPr lang="en-US" sz="2150" dirty="0">
-                <a:solidFill>
-                  <a:srgbClr val="1F1E1E"/>
-                </a:solidFill>
-                <a:latin typeface="Roboto Mono Medium" pitchFamily="34" charset="0"/>
-                <a:ea typeface="Roboto Mono Medium" pitchFamily="34" charset="-122"/>
-                <a:cs typeface="Roboto Mono Medium" pitchFamily="34" charset="-120"/>
-              </a:rPr>
-              <a:t>{{Slide title (h2) 1}}</a:t>
-            </a:r>
-            <a:endParaRPr lang="en-US" sz="2150" dirty="0"/>
-          </a:p>
-        </p:txBody>
-      </p:sp>
-      <p:sp>
-        <p:nvSpPr>
-          <p:cNvPr id="5" name="Shape 3"/>
-          <p:cNvSpPr/>
-          <p:nvPr/>
-        </p:nvSpPr>
-        <p:spPr>
-          <a:xfrm>
-            <a:off x="400273" y="1181174"/>
-            <a:ext cx="3693244" cy="3446413"/>
-          </a:xfrm>
-          <a:prstGeom prst="roundRect">
-            <a:avLst>
-              <a:gd name="adj" fmla="val 486"/>
-            </a:avLst>
-          </a:prstGeom>
-          <a:solidFill>
-            <a:srgbClr val="DA1B2E">
-              <a:alpha val="95000"/>
-            </a:srgbClr>
-          </a:solidFill>
-          <a:ln/>
-        </p:spPr>
-      </p:sp>
-      <p:sp>
-        <p:nvSpPr>
-          <p:cNvPr id="6" name="Text 4"/>
-          <p:cNvSpPr/>
-          <p:nvPr/>
-        </p:nvSpPr>
-        <p:spPr>
-          <a:xfrm>
-            <a:off x="511820" y="1251421"/>
-            <a:ext cx="1879104" cy="174278"/>
-          </a:xfrm>
-          <a:prstGeom prst="rect">
-            <a:avLst/>
-          </a:prstGeom>
-          <a:noFill/>
-          <a:ln/>
-        </p:spPr>
-        <p:txBody>
-          <a:bodyPr wrap="none" lIns="0" tIns="0" rIns="0" bIns="0" rtlCol="0" anchor="t"/>
-          <a:lstStyle/>
-          <a:p>
-            <a:pPr algn="l" indent="0" marL="0">
-              <a:lnSpc>
-                <a:spcPct val="104000"/>
-              </a:lnSpc>
-              <a:buNone/>
-            </a:pPr>
-            <a:r>
-              <a:rPr lang="en-US" sz="1050" dirty="0">
-                <a:solidFill>
-                  <a:srgbClr val="FFFFFF"/>
-                </a:solidFill>
-                <a:latin typeface="Roboto Mono Medium" pitchFamily="34" charset="0"/>
-                <a:ea typeface="Roboto Mono Medium" pitchFamily="34" charset="-122"/>
-                <a:cs typeface="Roboto Mono Medium" pitchFamily="34" charset="-120"/>
-              </a:rPr>
-              <a:t>{{Body paragraph 1}}</a:t>
-            </a:r>
-            <a:endParaRPr lang="en-US" sz="1050" dirty="0"/>
-          </a:p>
-        </p:txBody>
-      </p:sp>
-      <p:sp>
-        <p:nvSpPr>
-          <p:cNvPr id="7" name="Text 5"/>
-          <p:cNvSpPr/>
-          <p:nvPr/>
-        </p:nvSpPr>
-        <p:spPr>
-          <a:xfrm>
-            <a:off x="511820" y="1495946"/>
-            <a:ext cx="3470151" cy="436438"/>
-          </a:xfrm>
-          <a:prstGeom prst="rect">
-            <a:avLst/>
-          </a:prstGeom>
-          <a:noFill/>
-          <a:ln/>
-        </p:spPr>
-        <p:txBody>
-          <a:bodyPr wrap="square" lIns="0" tIns="0" rIns="0" bIns="0" rtlCol="0" anchor="t">
-            <a:normAutofit/>
-          </a:bodyPr>
-          <a:lstStyle/>
-          <a:p>
-            <a:pPr algn="l" indent="0" marL="0">
-              <a:lnSpc>
-                <a:spcPct val="109000"/>
-              </a:lnSpc>
-              <a:buNone/>
-            </a:pPr>
-            <a:r>
-              <a:rPr lang="en-US" sz="850" dirty="0">
-                <a:solidFill>
-                  <a:srgbClr val="FFFFFF"/>
-                </a:solidFill>
-                <a:latin typeface="Roboto" pitchFamily="34" charset="0"/>
-                <a:ea typeface="Roboto" pitchFamily="34" charset="-122"/>
-                <a:cs typeface="Roboto" pitchFamily="34" charset="-120"/>
-              </a:rPr>
-              <a:t>{{Caption / fine print 1}}</a:t>
-            </a:r>
-            <a:endParaRPr lang="en-US" sz="850" dirty="0"/>
-          </a:p>
-        </p:txBody>
-      </p:sp>
-      <p:pic>
-        <p:nvPicPr>
-          <p:cNvPr id="8" name="Image 0" descr="preencoded.png">    </p:cNvPr>
-          <p:cNvPicPr>
-            <a:picLocks noChangeAspect="1"/>
-          </p:cNvPicPr>
-          <p:nvPr/>
-        </p:nvPicPr>
-        <p:blipFill>
-          <a:blip r:embed="rId1">
-            <a:extLst>
-              <a:ext uri="{96DAC541-7B7A-43D3-8B79-37D633B846F1}">
-                <asvg:svgBlip xmlns:asvg="http://schemas.microsoft.com/office/drawing/2016/SVG/main" r:embed="rId2"/>
-              </a:ext>
-            </a:extLst>
-          </a:blip>
-          <a:stretch>
-            <a:fillRect/>
-          </a:stretch>
-        </p:blipFill>
-        <p:spPr>
-          <a:xfrm>
-            <a:off x="511820" y="2011412"/>
-            <a:ext cx="223168" cy="223168"/>
-          </a:xfrm>
-          <a:prstGeom prst="rect">
-            <a:avLst/>
-          </a:prstGeom>
-        </p:spPr>
-      </p:pic>
-      <p:sp>
-        <p:nvSpPr>
-          <p:cNvPr id="9" name="Text 6"/>
-          <p:cNvSpPr/>
-          <p:nvPr/>
-        </p:nvSpPr>
-        <p:spPr>
-          <a:xfrm>
-            <a:off x="822796" y="2049735"/>
-            <a:ext cx="1756470" cy="174278"/>
-          </a:xfrm>
-          <a:prstGeom prst="rect">
-            <a:avLst/>
-          </a:prstGeom>
-          <a:noFill/>
-          <a:ln/>
-        </p:spPr>
-        <p:txBody>
-          <a:bodyPr wrap="none" lIns="0" tIns="0" rIns="0" bIns="0" rtlCol="0" anchor="t"/>
-          <a:lstStyle/>
-          <a:p>
-            <a:pPr algn="l" indent="0" marL="0">
-              <a:lnSpc>
-                <a:spcPct val="104000"/>
-              </a:lnSpc>
-              <a:buNone/>
-            </a:pPr>
-            <a:r>
-              <a:rPr lang="en-US" sz="1050" dirty="0">
-                <a:solidFill>
-                  <a:srgbClr val="FFFFFF"/>
-                </a:solidFill>
-                <a:latin typeface="Roboto Mono Medium" pitchFamily="34" charset="0"/>
-                <a:ea typeface="Roboto Mono Medium" pitchFamily="34" charset="-122"/>
-                <a:cs typeface="Roboto Mono Medium" pitchFamily="34" charset="-120"/>
-              </a:rPr>
-              <a:t>{{Body paragraph 2}}</a:t>
-            </a:r>
-            <a:endParaRPr lang="en-US" sz="1050" dirty="0"/>
-          </a:p>
-        </p:txBody>
-      </p:sp>
-      <p:sp>
-        <p:nvSpPr>
-          <p:cNvPr id="10" name="Text 7"/>
-          <p:cNvSpPr/>
-          <p:nvPr/>
-        </p:nvSpPr>
-        <p:spPr>
-          <a:xfrm>
-            <a:off x="822796" y="2294260"/>
-            <a:ext cx="3159175" cy="290959"/>
-          </a:xfrm>
-          <a:prstGeom prst="rect">
-            <a:avLst/>
-          </a:prstGeom>
-          <a:noFill/>
-          <a:ln/>
-        </p:spPr>
-        <p:txBody>
-          <a:bodyPr wrap="square" lIns="0" tIns="0" rIns="0" bIns="0" rtlCol="0" anchor="t">
-            <a:normAutofit/>
-          </a:bodyPr>
-          <a:lstStyle/>
-          <a:p>
-            <a:pPr algn="l" indent="0" marL="0">
-              <a:lnSpc>
-                <a:spcPct val="109000"/>
-              </a:lnSpc>
-              <a:buNone/>
-            </a:pPr>
-            <a:r>
-              <a:rPr lang="en-US" sz="850" dirty="0">
-                <a:solidFill>
-                  <a:srgbClr val="FFFFFF"/>
-                </a:solidFill>
-                <a:latin typeface="Roboto" pitchFamily="34" charset="0"/>
-                <a:ea typeface="Roboto" pitchFamily="34" charset="-122"/>
-                <a:cs typeface="Roboto" pitchFamily="34" charset="-120"/>
-              </a:rPr>
-              <a:t>{{Caption / fine print 2}}</a:t>
-            </a:r>
-            <a:endParaRPr lang="en-US" sz="850" dirty="0"/>
-          </a:p>
-        </p:txBody>
-      </p:sp>
-      <p:pic>
-        <p:nvPicPr>
-          <p:cNvPr id="11" name="Image 1" descr="preencoded.png">    </p:cNvPr>
-          <p:cNvPicPr>
-            <a:picLocks noChangeAspect="1"/>
-          </p:cNvPicPr>
-          <p:nvPr/>
-        </p:nvPicPr>
-        <p:blipFill>
-          <a:blip r:embed="rId3">
-            <a:extLst>
-              <a:ext uri="{96DAC541-7B7A-43D3-8B79-37D633B846F1}">
-                <asvg:svgBlip xmlns:asvg="http://schemas.microsoft.com/office/drawing/2016/SVG/main" r:embed="rId4"/>
-              </a:ext>
-            </a:extLst>
-          </a:blip>
-          <a:stretch>
-            <a:fillRect/>
-          </a:stretch>
-        </p:blipFill>
-        <p:spPr>
-          <a:xfrm>
-            <a:off x="511820" y="2725713"/>
-            <a:ext cx="223168" cy="223168"/>
-          </a:xfrm>
-          <a:prstGeom prst="rect">
-            <a:avLst/>
-          </a:prstGeom>
-        </p:spPr>
-      </p:pic>
-      <p:sp>
-        <p:nvSpPr>
-          <p:cNvPr id="12" name="Text 8"/>
-          <p:cNvSpPr/>
-          <p:nvPr/>
-        </p:nvSpPr>
-        <p:spPr>
-          <a:xfrm>
-            <a:off x="822796" y="2764036"/>
-            <a:ext cx="2174677" cy="174278"/>
-          </a:xfrm>
-          <a:prstGeom prst="rect">
-            <a:avLst/>
-          </a:prstGeom>
-          <a:noFill/>
-          <a:ln/>
-        </p:spPr>
-        <p:txBody>
-          <a:bodyPr wrap="none" lIns="0" tIns="0" rIns="0" bIns="0" rtlCol="0" anchor="t"/>
-          <a:lstStyle/>
-          <a:p>
-            <a:pPr algn="l" indent="0" marL="0">
-              <a:lnSpc>
-                <a:spcPct val="104000"/>
-              </a:lnSpc>
-              <a:buNone/>
-            </a:pPr>
-            <a:r>
-              <a:rPr lang="en-US" sz="1050" dirty="0">
-                <a:solidFill>
-                  <a:srgbClr val="FFFFFF"/>
-                </a:solidFill>
-                <a:latin typeface="Roboto Mono Medium" pitchFamily="34" charset="0"/>
-                <a:ea typeface="Roboto Mono Medium" pitchFamily="34" charset="-122"/>
-                <a:cs typeface="Roboto Mono Medium" pitchFamily="34" charset="-120"/>
-              </a:rPr>
-              <a:t>{{Body paragraph 3}}</a:t>
-            </a:r>
-            <a:endParaRPr lang="en-US" sz="1050" dirty="0"/>
-          </a:p>
-        </p:txBody>
-      </p:sp>
-      <p:sp>
-        <p:nvSpPr>
-          <p:cNvPr id="13" name="Text 9"/>
-          <p:cNvSpPr/>
-          <p:nvPr/>
-        </p:nvSpPr>
-        <p:spPr>
-          <a:xfrm>
-            <a:off x="822796" y="3008561"/>
-            <a:ext cx="3159175" cy="290959"/>
-          </a:xfrm>
-          <a:prstGeom prst="rect">
-            <a:avLst/>
-          </a:prstGeom>
-          <a:noFill/>
-          <a:ln/>
-        </p:spPr>
-        <p:txBody>
-          <a:bodyPr wrap="square" lIns="0" tIns="0" rIns="0" bIns="0" rtlCol="0" anchor="t">
-            <a:normAutofit/>
-          </a:bodyPr>
-          <a:lstStyle/>
-          <a:p>
-            <a:pPr algn="l" indent="0" marL="0">
-              <a:lnSpc>
-                <a:spcPct val="109000"/>
-              </a:lnSpc>
-              <a:buNone/>
-            </a:pPr>
-            <a:r>
-              <a:rPr lang="en-US" sz="850" dirty="0">
-                <a:solidFill>
-                  <a:srgbClr val="FFFFFF"/>
-                </a:solidFill>
-                <a:latin typeface="Roboto" pitchFamily="34" charset="0"/>
-                <a:ea typeface="Roboto" pitchFamily="34" charset="-122"/>
-                <a:cs typeface="Roboto" pitchFamily="34" charset="-120"/>
-              </a:rPr>
-              <a:t>{{Caption / fine print 3}}</a:t>
-            </a:r>
-            <a:endParaRPr lang="en-US" sz="850" dirty="0"/>
-          </a:p>
-        </p:txBody>
-      </p:sp>
-      <p:pic>
-        <p:nvPicPr>
-          <p:cNvPr id="14" name="Image 2" descr="preencoded.png">    </p:cNvPr>
-          <p:cNvPicPr>
-            <a:picLocks noChangeAspect="1"/>
-          </p:cNvPicPr>
-          <p:nvPr/>
-        </p:nvPicPr>
-        <p:blipFill>
-          <a:blip r:embed="rId5">
-            <a:extLst>
-              <a:ext uri="{96DAC541-7B7A-43D3-8B79-37D633B846F1}">
-                <asvg:svgBlip xmlns:asvg="http://schemas.microsoft.com/office/drawing/2016/SVG/main" r:embed="rId6"/>
-              </a:ext>
-            </a:extLst>
-          </a:blip>
-          <a:stretch>
-            <a:fillRect/>
-          </a:stretch>
-        </p:blipFill>
-        <p:spPr>
-          <a:xfrm>
-            <a:off x="511820" y="3440013"/>
-            <a:ext cx="223168" cy="223168"/>
-          </a:xfrm>
-          <a:prstGeom prst="rect">
-            <a:avLst/>
-          </a:prstGeom>
-        </p:spPr>
-      </p:pic>
-      <p:sp>
-        <p:nvSpPr>
-          <p:cNvPr id="15" name="Text 10"/>
-          <p:cNvSpPr/>
-          <p:nvPr/>
-        </p:nvSpPr>
-        <p:spPr>
-          <a:xfrm>
-            <a:off x="822796" y="3478337"/>
-            <a:ext cx="1756470" cy="174278"/>
-          </a:xfrm>
-          <a:prstGeom prst="rect">
-            <a:avLst/>
-          </a:prstGeom>
-          <a:noFill/>
-          <a:ln/>
-        </p:spPr>
-        <p:txBody>
-          <a:bodyPr wrap="none" lIns="0" tIns="0" rIns="0" bIns="0" rtlCol="0" anchor="t"/>
-          <a:lstStyle/>
-          <a:p>
-            <a:pPr algn="l" indent="0" marL="0">
-              <a:lnSpc>
-                <a:spcPct val="104000"/>
-              </a:lnSpc>
-              <a:buNone/>
-            </a:pPr>
-            <a:r>
-              <a:rPr lang="en-US" sz="1050" dirty="0">
-                <a:solidFill>
-                  <a:srgbClr val="FFFFFF"/>
-                </a:solidFill>
-                <a:latin typeface="Roboto Mono Medium" pitchFamily="34" charset="0"/>
-                <a:ea typeface="Roboto Mono Medium" pitchFamily="34" charset="-122"/>
-                <a:cs typeface="Roboto Mono Medium" pitchFamily="34" charset="-120"/>
-              </a:rPr>
-              <a:t>{{Body paragraph 4}}</a:t>
-            </a:r>
-            <a:endParaRPr lang="en-US" sz="1050" dirty="0"/>
-          </a:p>
-        </p:txBody>
-      </p:sp>
-      <p:sp>
-        <p:nvSpPr>
-          <p:cNvPr id="16" name="Text 11"/>
-          <p:cNvSpPr/>
-          <p:nvPr/>
-        </p:nvSpPr>
-        <p:spPr>
-          <a:xfrm>
-            <a:off x="822796" y="3722861"/>
-            <a:ext cx="3159175" cy="290959"/>
-          </a:xfrm>
-          <a:prstGeom prst="rect">
-            <a:avLst/>
-          </a:prstGeom>
-          <a:noFill/>
-          <a:ln/>
-        </p:spPr>
-        <p:txBody>
-          <a:bodyPr wrap="square" lIns="0" tIns="0" rIns="0" bIns="0" rtlCol="0" anchor="t">
-            <a:normAutofit/>
-          </a:bodyPr>
-          <a:lstStyle/>
-          <a:p>
-            <a:pPr algn="l" indent="0" marL="0">
-              <a:lnSpc>
-                <a:spcPct val="109000"/>
-              </a:lnSpc>
-              <a:buNone/>
-            </a:pPr>
-            <a:r>
-              <a:rPr lang="en-US" sz="850" dirty="0">
-                <a:solidFill>
-                  <a:srgbClr val="FFFFFF"/>
-                </a:solidFill>
-                <a:latin typeface="Roboto" pitchFamily="34" charset="0"/>
-                <a:ea typeface="Roboto" pitchFamily="34" charset="-122"/>
-                <a:cs typeface="Roboto" pitchFamily="34" charset="-120"/>
-              </a:rPr>
-              <a:t>{{Caption / fine print 4}}</a:t>
-            </a:r>
-            <a:endParaRPr lang="en-US" sz="850" dirty="0"/>
-          </a:p>
-        </p:txBody>
-      </p:sp>
-      <p:sp>
-        <p:nvSpPr>
-          <p:cNvPr id="17" name="Text 12"/>
-          <p:cNvSpPr/>
-          <p:nvPr/>
-        </p:nvSpPr>
-        <p:spPr>
-          <a:xfrm>
-            <a:off x="4290120" y="1251421"/>
-            <a:ext cx="2548235" cy="174278"/>
-          </a:xfrm>
-          <a:prstGeom prst="rect">
-            <a:avLst/>
-          </a:prstGeom>
-          <a:noFill/>
-          <a:ln/>
-        </p:spPr>
-        <p:txBody>
-          <a:bodyPr wrap="none" lIns="0" tIns="0" rIns="0" bIns="0" rtlCol="0" anchor="t"/>
-          <a:lstStyle/>
-          <a:p>
-            <a:pPr algn="l" indent="0" marL="0">
-              <a:lnSpc>
-                <a:spcPct val="104000"/>
-              </a:lnSpc>
-              <a:buNone/>
-            </a:pPr>
-            <a:r>
-              <a:rPr lang="en-US" sz="1050" dirty="0">
-                <a:solidFill>
-                  <a:srgbClr val="1F1E1E"/>
-                </a:solidFill>
-                <a:latin typeface="Roboto Mono Medium" pitchFamily="34" charset="0"/>
-                <a:ea typeface="Roboto Mono Medium" pitchFamily="34" charset="-122"/>
-                <a:cs typeface="Roboto Mono Medium" pitchFamily="34" charset="-120"/>
-              </a:rPr>
-              <a:t>{{Body paragraph 5}}</a:t>
-            </a:r>
-            <a:endParaRPr lang="en-US" sz="1050" dirty="0"/>
-          </a:p>
-        </p:txBody>
-      </p:sp>
-      <p:sp>
-        <p:nvSpPr>
-          <p:cNvPr id="18" name="Shape 13"/>
-          <p:cNvSpPr/>
-          <p:nvPr/>
-        </p:nvSpPr>
-        <p:spPr>
-          <a:xfrm>
-            <a:off x="4290120" y="1504727"/>
-            <a:ext cx="4378003" cy="3043833"/>
-          </a:xfrm>
-          <a:prstGeom prst="roundRect">
-            <a:avLst>
-              <a:gd name="adj" fmla="val 188"/>
-            </a:avLst>
-          </a:prstGeom>
-          <a:solidFill>
-            <a:srgbClr val="F2EEEE"/>
-          </a:solidFill>
-          <a:ln w="4763">
-            <a:solidFill>
-              <a:srgbClr val="D8D4D4"/>
-            </a:solidFill>
-            <a:prstDash val="solid"/>
-          </a:ln>
-        </p:spPr>
-      </p:sp>
-      <p:sp>
-        <p:nvSpPr>
-          <p:cNvPr id="19" name="Shape 14"/>
-          <p:cNvSpPr/>
-          <p:nvPr/>
-        </p:nvSpPr>
-        <p:spPr>
-          <a:xfrm>
-            <a:off x="4294882" y="1509489"/>
-            <a:ext cx="4368478" cy="758577"/>
-          </a:xfrm>
-          <a:prstGeom prst="roundRect">
-            <a:avLst>
-              <a:gd name="adj" fmla="val 753"/>
-            </a:avLst>
-          </a:prstGeom>
-          <a:solidFill>
-            <a:srgbClr val="F2EEEE"/>
-          </a:solidFill>
-          <a:ln/>
-        </p:spPr>
-      </p:sp>
-      <p:sp>
-        <p:nvSpPr>
-          <p:cNvPr id="20" name="Text 15"/>
-          <p:cNvSpPr/>
-          <p:nvPr/>
-        </p:nvSpPr>
-        <p:spPr>
-          <a:xfrm>
-            <a:off x="4406429" y="1621036"/>
-            <a:ext cx="1421904" cy="174278"/>
-          </a:xfrm>
-          <a:prstGeom prst="rect">
-            <a:avLst/>
-          </a:prstGeom>
-          <a:noFill/>
-          <a:ln/>
-        </p:spPr>
-        <p:txBody>
-          <a:bodyPr wrap="none" lIns="0" tIns="0" rIns="0" bIns="0" rtlCol="0" anchor="t"/>
-          <a:lstStyle/>
-          <a:p>
-            <a:pPr algn="l" indent="0" marL="0">
-              <a:lnSpc>
-                <a:spcPct val="104000"/>
-              </a:lnSpc>
-              <a:buNone/>
-            </a:pPr>
-            <a:r>
-              <a:rPr lang="en-US" sz="1050" dirty="0">
-                <a:solidFill>
-                  <a:srgbClr val="3B3535"/>
-                </a:solidFill>
-                <a:latin typeface="Roboto Mono Medium" pitchFamily="34" charset="0"/>
-                <a:ea typeface="Roboto Mono Medium" pitchFamily="34" charset="-122"/>
-                <a:cs typeface="Roboto Mono Medium" pitchFamily="34" charset="-120"/>
-              </a:rPr>
-              <a:t>{{Body paragraph 6}}</a:t>
-            </a:r>
-            <a:endParaRPr lang="en-US" sz="1050" dirty="0"/>
-          </a:p>
-        </p:txBody>
-      </p:sp>
-      <p:sp>
-        <p:nvSpPr>
-          <p:cNvPr id="21" name="Text 16"/>
-          <p:cNvSpPr/>
-          <p:nvPr/>
-        </p:nvSpPr>
-        <p:spPr>
-          <a:xfrm>
-            <a:off x="4406429" y="1865561"/>
-            <a:ext cx="4145384" cy="290959"/>
-          </a:xfrm>
-          <a:prstGeom prst="rect">
-            <a:avLst/>
-          </a:prstGeom>
-          <a:noFill/>
-          <a:ln/>
-        </p:spPr>
-        <p:txBody>
-          <a:bodyPr wrap="square" lIns="0" tIns="0" rIns="0" bIns="0" rtlCol="0" anchor="t">
-            <a:normAutofit/>
-          </a:bodyPr>
-          <a:lstStyle/>
-          <a:p>
-            <a:pPr algn="l" indent="0" marL="0">
-              <a:lnSpc>
-                <a:spcPct val="109000"/>
-              </a:lnSpc>
-              <a:buNone/>
-            </a:pPr>
-            <a:r>
-              <a:rPr lang="en-US" sz="850" dirty="0">
-                <a:solidFill>
-                  <a:srgbClr val="3B3535"/>
-                </a:solidFill>
-                <a:latin typeface="Roboto" pitchFamily="34" charset="0"/>
-                <a:ea typeface="Roboto" pitchFamily="34" charset="-122"/>
-                <a:cs typeface="Roboto" pitchFamily="34" charset="-120"/>
-              </a:rPr>
-              <a:t>{{Caption / fine print 5}}</a:t>
-            </a:r>
-            <a:endParaRPr lang="en-US" sz="850" dirty="0"/>
-          </a:p>
-        </p:txBody>
-      </p:sp>
-      <p:sp>
-        <p:nvSpPr>
-          <p:cNvPr id="22" name="Shape 17"/>
-          <p:cNvSpPr/>
-          <p:nvPr/>
-        </p:nvSpPr>
-        <p:spPr>
-          <a:xfrm>
-            <a:off x="4294882" y="2268066"/>
-            <a:ext cx="4368478" cy="758577"/>
-          </a:xfrm>
-          <a:prstGeom prst="rect">
-            <a:avLst/>
-          </a:prstGeom>
-          <a:solidFill>
-            <a:srgbClr val="F2EEEE"/>
-          </a:solidFill>
-          <a:ln/>
-        </p:spPr>
-      </p:sp>
-      <p:sp>
-        <p:nvSpPr>
-          <p:cNvPr id="23" name="Shape 18"/>
-          <p:cNvSpPr/>
-          <p:nvPr/>
-        </p:nvSpPr>
-        <p:spPr>
-          <a:xfrm>
-            <a:off x="4294882" y="2268066"/>
-            <a:ext cx="4368478" cy="14288"/>
-          </a:xfrm>
-          <a:prstGeom prst="roundRect">
-            <a:avLst>
-              <a:gd name="adj" fmla="val 39999"/>
-            </a:avLst>
-          </a:prstGeom>
-          <a:solidFill>
-            <a:srgbClr val="D8D4D4"/>
-          </a:solidFill>
-          <a:ln/>
-        </p:spPr>
-      </p:sp>
-      <p:sp>
-        <p:nvSpPr>
-          <p:cNvPr id="24" name="Text 19"/>
-          <p:cNvSpPr/>
-          <p:nvPr/>
-        </p:nvSpPr>
-        <p:spPr>
-          <a:xfrm>
-            <a:off x="4406429" y="2379613"/>
-            <a:ext cx="2091035" cy="174278"/>
-          </a:xfrm>
-          <a:prstGeom prst="rect">
-            <a:avLst/>
-          </a:prstGeom>
-          <a:noFill/>
-          <a:ln/>
-        </p:spPr>
-        <p:txBody>
-          <a:bodyPr wrap="none" lIns="0" tIns="0" rIns="0" bIns="0" rtlCol="0" anchor="t"/>
-          <a:lstStyle/>
-          <a:p>
-            <a:pPr algn="l" indent="0" marL="0">
-              <a:lnSpc>
-                <a:spcPct val="104000"/>
-              </a:lnSpc>
-              <a:buNone/>
-            </a:pPr>
-            <a:r>
-              <a:rPr lang="en-US" sz="1050" dirty="0">
-                <a:solidFill>
-                  <a:srgbClr val="3B3535"/>
-                </a:solidFill>
-                <a:latin typeface="Roboto Mono Medium" pitchFamily="34" charset="0"/>
-                <a:ea typeface="Roboto Mono Medium" pitchFamily="34" charset="-122"/>
-                <a:cs typeface="Roboto Mono Medium" pitchFamily="34" charset="-120"/>
-              </a:rPr>
-              <a:t>{{Body paragraph 7}}</a:t>
-            </a:r>
-            <a:endParaRPr lang="en-US" sz="1050" dirty="0"/>
-          </a:p>
-        </p:txBody>
-      </p:sp>
-      <p:sp>
-        <p:nvSpPr>
-          <p:cNvPr id="25" name="Text 20"/>
-          <p:cNvSpPr/>
-          <p:nvPr/>
-        </p:nvSpPr>
-        <p:spPr>
-          <a:xfrm>
-            <a:off x="4406429" y="2624138"/>
-            <a:ext cx="4145384" cy="290959"/>
-          </a:xfrm>
-          <a:prstGeom prst="rect">
-            <a:avLst/>
-          </a:prstGeom>
-          <a:noFill/>
-          <a:ln/>
-        </p:spPr>
-        <p:txBody>
-          <a:bodyPr wrap="square" lIns="0" tIns="0" rIns="0" bIns="0" rtlCol="0" anchor="t">
-            <a:normAutofit/>
-          </a:bodyPr>
-          <a:lstStyle/>
-          <a:p>
-            <a:pPr algn="l" indent="0" marL="0">
-              <a:lnSpc>
-                <a:spcPct val="109000"/>
-              </a:lnSpc>
-              <a:buNone/>
-            </a:pPr>
-            <a:r>
-              <a:rPr lang="en-US" sz="850" dirty="0">
-                <a:solidFill>
-                  <a:srgbClr val="3B3535"/>
-                </a:solidFill>
-                <a:latin typeface="Roboto" pitchFamily="34" charset="0"/>
-                <a:ea typeface="Roboto" pitchFamily="34" charset="-122"/>
-                <a:cs typeface="Roboto" pitchFamily="34" charset="-120"/>
-              </a:rPr>
-              <a:t>{{Caption / fine print 6}}</a:t>
-            </a:r>
-            <a:endParaRPr lang="en-US" sz="850" dirty="0"/>
-          </a:p>
-        </p:txBody>
-      </p:sp>
-      <p:sp>
-        <p:nvSpPr>
-          <p:cNvPr id="26" name="Shape 21"/>
-          <p:cNvSpPr/>
-          <p:nvPr/>
-        </p:nvSpPr>
-        <p:spPr>
-          <a:xfrm>
-            <a:off x="4294882" y="3026643"/>
-            <a:ext cx="4368478" cy="758577"/>
-          </a:xfrm>
-          <a:prstGeom prst="rect">
-            <a:avLst/>
-          </a:prstGeom>
-          <a:solidFill>
-            <a:srgbClr val="F2EEEE"/>
-          </a:solidFill>
-          <a:ln/>
-        </p:spPr>
-      </p:sp>
-      <p:sp>
-        <p:nvSpPr>
-          <p:cNvPr id="27" name="Shape 22"/>
-          <p:cNvSpPr/>
-          <p:nvPr/>
-        </p:nvSpPr>
-        <p:spPr>
-          <a:xfrm>
-            <a:off x="4294882" y="3026643"/>
-            <a:ext cx="4368478" cy="14288"/>
-          </a:xfrm>
-          <a:prstGeom prst="roundRect">
-            <a:avLst>
-              <a:gd name="adj" fmla="val 39999"/>
-            </a:avLst>
-          </a:prstGeom>
-          <a:solidFill>
-            <a:srgbClr val="D8D4D4"/>
-          </a:solidFill>
-          <a:ln/>
-        </p:spPr>
-      </p:sp>
-      <p:sp>
-        <p:nvSpPr>
-          <p:cNvPr id="28" name="Text 23"/>
-          <p:cNvSpPr/>
-          <p:nvPr/>
-        </p:nvSpPr>
-        <p:spPr>
-          <a:xfrm>
-            <a:off x="4406429" y="3138190"/>
-            <a:ext cx="1923752" cy="174278"/>
-          </a:xfrm>
-          <a:prstGeom prst="rect">
-            <a:avLst/>
-          </a:prstGeom>
-          <a:noFill/>
-          <a:ln/>
-        </p:spPr>
-        <p:txBody>
-          <a:bodyPr wrap="none" lIns="0" tIns="0" rIns="0" bIns="0" rtlCol="0" anchor="t"/>
-          <a:lstStyle/>
-          <a:p>
-            <a:pPr algn="l" indent="0" marL="0">
-              <a:lnSpc>
-                <a:spcPct val="104000"/>
-              </a:lnSpc>
-              <a:buNone/>
-            </a:pPr>
-            <a:r>
-              <a:rPr lang="en-US" sz="1050" dirty="0">
-                <a:solidFill>
-                  <a:srgbClr val="3B3535"/>
-                </a:solidFill>
-                <a:latin typeface="Roboto Mono Medium" pitchFamily="34" charset="0"/>
-                <a:ea typeface="Roboto Mono Medium" pitchFamily="34" charset="-122"/>
-                <a:cs typeface="Roboto Mono Medium" pitchFamily="34" charset="-120"/>
-              </a:rPr>
-              <a:t>{{Body paragraph 8}}</a:t>
-            </a:r>
-            <a:endParaRPr lang="en-US" sz="1050" dirty="0"/>
-          </a:p>
-        </p:txBody>
-      </p:sp>
-      <p:sp>
-        <p:nvSpPr>
-          <p:cNvPr id="29" name="Text 24"/>
-          <p:cNvSpPr/>
-          <p:nvPr/>
-        </p:nvSpPr>
-        <p:spPr>
-          <a:xfrm>
-            <a:off x="4406429" y="3382714"/>
-            <a:ext cx="4145384" cy="290959"/>
-          </a:xfrm>
-          <a:prstGeom prst="rect">
-            <a:avLst/>
-          </a:prstGeom>
-          <a:noFill/>
-          <a:ln/>
-        </p:spPr>
-        <p:txBody>
-          <a:bodyPr wrap="square" lIns="0" tIns="0" rIns="0" bIns="0" rtlCol="0" anchor="t">
-            <a:normAutofit/>
-          </a:bodyPr>
-          <a:lstStyle/>
-          <a:p>
-            <a:pPr algn="l" indent="0" marL="0">
-              <a:lnSpc>
-                <a:spcPct val="109000"/>
-              </a:lnSpc>
-              <a:buNone/>
-            </a:pPr>
-            <a:r>
-              <a:rPr lang="en-US" sz="850" dirty="0">
-                <a:solidFill>
-                  <a:srgbClr val="3B3535"/>
-                </a:solidFill>
-                <a:latin typeface="Roboto" pitchFamily="34" charset="0"/>
-                <a:ea typeface="Roboto" pitchFamily="34" charset="-122"/>
-                <a:cs typeface="Roboto" pitchFamily="34" charset="-120"/>
-              </a:rPr>
-              <a:t>{{Caption / fine print 7}}</a:t>
-            </a:r>
-            <a:endParaRPr lang="en-US" sz="850" dirty="0"/>
-          </a:p>
-        </p:txBody>
-      </p:sp>
-      <p:sp>
-        <p:nvSpPr>
-          <p:cNvPr id="30" name="Shape 25"/>
-          <p:cNvSpPr/>
-          <p:nvPr/>
-        </p:nvSpPr>
-        <p:spPr>
-          <a:xfrm>
-            <a:off x="4294882" y="3785220"/>
-            <a:ext cx="4368478" cy="758577"/>
-          </a:xfrm>
-          <a:prstGeom prst="rect">
-            <a:avLst/>
-          </a:prstGeom>
-          <a:solidFill>
-            <a:srgbClr val="F2EEEE"/>
-          </a:solidFill>
-          <a:ln/>
-        </p:spPr>
-      </p:sp>
-      <p:sp>
-        <p:nvSpPr>
-          <p:cNvPr id="31" name="Shape 26"/>
-          <p:cNvSpPr/>
-          <p:nvPr/>
-        </p:nvSpPr>
-        <p:spPr>
-          <a:xfrm>
-            <a:off x="4294882" y="3785220"/>
-            <a:ext cx="4368478" cy="14288"/>
-          </a:xfrm>
-          <a:prstGeom prst="roundRect">
-            <a:avLst>
-              <a:gd name="adj" fmla="val 39999"/>
-            </a:avLst>
-          </a:prstGeom>
-          <a:solidFill>
-            <a:srgbClr val="D8D4D4"/>
-          </a:solidFill>
-          <a:ln/>
-        </p:spPr>
-      </p:sp>
-      <p:sp>
-        <p:nvSpPr>
-          <p:cNvPr id="32" name="Text 27"/>
-          <p:cNvSpPr/>
-          <p:nvPr/>
-        </p:nvSpPr>
-        <p:spPr>
-          <a:xfrm>
-            <a:off x="4406429" y="3896767"/>
-            <a:ext cx="1394817" cy="174278"/>
-          </a:xfrm>
-          <a:prstGeom prst="rect">
-            <a:avLst/>
-          </a:prstGeom>
-          <a:noFill/>
-          <a:ln/>
-        </p:spPr>
-        <p:txBody>
-          <a:bodyPr wrap="none" lIns="0" tIns="0" rIns="0" bIns="0" rtlCol="0" anchor="t"/>
-          <a:lstStyle/>
-          <a:p>
-            <a:pPr algn="l" indent="0" marL="0">
-              <a:lnSpc>
-                <a:spcPct val="104000"/>
-              </a:lnSpc>
-              <a:buNone/>
-            </a:pPr>
-            <a:r>
-              <a:rPr lang="en-US" sz="1050" dirty="0">
-                <a:solidFill>
-                  <a:srgbClr val="3B3535"/>
-                </a:solidFill>
-                <a:latin typeface="Roboto Mono Medium" pitchFamily="34" charset="0"/>
-                <a:ea typeface="Roboto Mono Medium" pitchFamily="34" charset="-122"/>
-                <a:cs typeface="Roboto Mono Medium" pitchFamily="34" charset="-120"/>
-              </a:rPr>
-              <a:t>{{Body paragraph 9}}</a:t>
-            </a:r>
-            <a:endParaRPr lang="en-US" sz="1050" dirty="0"/>
-          </a:p>
-        </p:txBody>
-      </p:sp>
-      <p:sp>
-        <p:nvSpPr>
-          <p:cNvPr id="33" name="Text 28"/>
-          <p:cNvSpPr/>
-          <p:nvPr/>
-        </p:nvSpPr>
-        <p:spPr>
-          <a:xfrm>
-            <a:off x="4406429" y="4141291"/>
-            <a:ext cx="4145384" cy="290959"/>
-          </a:xfrm>
-          <a:prstGeom prst="rect">
-            <a:avLst/>
-          </a:prstGeom>
-          <a:noFill/>
-          <a:ln/>
-        </p:spPr>
-        <p:txBody>
-          <a:bodyPr wrap="square" lIns="0" tIns="0" rIns="0" bIns="0" rtlCol="0" anchor="t">
-            <a:normAutofit/>
-          </a:bodyPr>
-          <a:lstStyle/>
-          <a:p>
-            <a:pPr algn="l" indent="0" marL="0">
-              <a:lnSpc>
-                <a:spcPct val="109000"/>
-              </a:lnSpc>
-              <a:buNone/>
-            </a:pPr>
-            <a:r>
-              <a:rPr lang="en-US" sz="850" dirty="0">
-                <a:solidFill>
-                  <a:srgbClr val="3B3535"/>
-                </a:solidFill>
-                <a:latin typeface="Roboto" pitchFamily="34" charset="0"/>
-                <a:ea typeface="Roboto" pitchFamily="34" charset="-122"/>
-                <a:cs typeface="Roboto" pitchFamily="34" charset="-120"/>
-              </a:rPr>
-              <a:t>{{Caption / fine print 8}}</a:t>
-            </a:r>
-            <a:endParaRPr lang="en-US" sz="850" dirty="0"/>
           </a:p>
         </p:txBody>
       </p:sp>
